--- a/curso/pptx/S82.pptx
+++ b/curso/pptx/S82.pptx
@@ -7233,7 +7233,7 @@
                 </a:solidFill>
                 <a:latin typeface="Nunito Sans"/>
               </a:rPr>
-              <a:t>Del Instituto Nacional de Estadística (</a:t>
+              <a:t>Datos oficiales sobre España (</a:t>
             </a:r>
             <a:r>
               <a:rPr sz="2400" b="1">
@@ -7251,7 +7251,7 @@
                 </a:solidFill>
                 <a:latin typeface="Nunito Sans"/>
               </a:rPr>
-              <a:t>), sobre España:</a:t>
+              <a:t> y Seguridad Social):</a:t>
             </a:r>
           </a:p>
         </p:txBody>

--- a/curso/pptx/S82.pptx
+++ b/curso/pptx/S82.pptx
@@ -3903,7 +3903,7 @@
                 </a:solidFill>
                 <a:latin typeface="Nunito Sans"/>
               </a:rPr>
-              <a:t>Leire lee: «Las mujeres cobran de media menos que los hombres». Concluye: «Entonces a mi madre le pagan menos que a su compañero por hacer lo mismo».</a:t>
+              <a:t>Una chica lee: «Las mujeres cobran de media menos que los hombres». Concluye: «Entonces a mi madre le pagan menos que a su compañero por hacer lo mismo».</a:t>
             </a:r>
           </a:p>
         </p:txBody>
@@ -4593,7 +4593,7 @@
                 </a:solidFill>
                 <a:latin typeface="Nunito Sans"/>
               </a:rPr>
-              <a:t>Dylan: «La diferencia de sueldo es porque muchas mujeres trabajan a jornada parcial. Así que no hay ninguna desigualdad».</a:t>
+              <a:t>Un chico: «La diferencia de sueldo es porque muchas mujeres trabajan a jornada parcial. Así que no hay ninguna desigualdad».</a:t>
             </a:r>
           </a:p>
         </p:txBody>
@@ -6301,7 +6301,7 @@
                 </a:solidFill>
                 <a:latin typeface="Nunito Sans"/>
               </a:rPr>
-              <a:t>Kevin: «Las chicas y los chicos ya son iguales. Hoy cualquiera puede estudiar lo que quiera».</a:t>
+              <a:t>Un chico: «Las chicas y los chicos ya son iguales. Hoy cualquiera puede estudiar lo que quiera».</a:t>
             </a:r>
           </a:p>
         </p:txBody>
@@ -6701,7 +6701,7 @@
                           </a:solidFill>
                           <a:latin typeface="Nunito Sans"/>
                         </a:rPr>
-                        <a:t>Leire es alta y Omar, bajito. A Iker le gusta bailar.</a:t>
+                        <a:t>Una chica es alta y un chico, bajito. A otro le gusta bailar.</a:t>
                       </a:r>
                     </a:p>
                   </a:txBody>

--- a/curso/pptx/S82.pptx
+++ b/curso/pptx/S82.pptx
@@ -22,6 +22,7 @@
     <p:sldId id="270" r:id="rId22"/>
     <p:sldId id="271" r:id="rId23"/>
     <p:sldId id="272" r:id="rId24"/>
+    <p:sldId id="273" r:id="rId25"/>
   </p:sldIdLst>
   <p:sldSz cx="12192000" cy="6858000" type="screen4x3"/>
   <p:notesSz cx="6858000" cy="9144000"/>
@@ -3535,7 +3536,7 @@
                 </a:solidFill>
                 <a:latin typeface="Nunito Sans"/>
               </a:rPr>
-              <a:t>PENSAMIENTO CRÍTICO · SESIÓN 82 · UNIDAD 18 · DIFERENTES, PERO IGUALES</a:t>
+              <a:t>PENSAMIENTO CRÍTICO · SESIÓN 82 · UNIDAD 18 · GLOCAL: CULTURAS Y MIGRACIONES</a:t>
             </a:r>
           </a:p>
         </p:txBody>
@@ -3574,7 +3575,7 @@
                 </a:solidFill>
                 <a:latin typeface="Fredoka"/>
               </a:rPr>
-              <a:t>La desigualdad de género</a:t>
+              <a:t>Globalización y migraciones</a:t>
             </a:r>
           </a:p>
         </p:txBody>
@@ -3613,7 +3614,7 @@
                 </a:solidFill>
                 <a:latin typeface="Nunito Sans"/>
               </a:rPr>
-              <a:t>Ser diferentes no es lo mismo que ser desiguales; los datos muestran desigualdades de género, y cada diferencia pide preguntar por qué.</a:t>
+              <a:t>El mundo está cada vez más conectado y las personas siempre han migrado; sobre los migrantes circulan bulos y generalizaciones que hay que comprobar.</a:t>
             </a:r>
           </a:p>
         </p:txBody>
@@ -3627,6 +3628,269 @@
 </file>
 
 <file path=ppt/slides/slide10.xml><?xml version="1.0" encoding="utf-8"?>
+<p:sld xmlns:a="http://schemas.openxmlformats.org/drawingml/2006/main" xmlns:p="http://schemas.openxmlformats.org/presentationml/2006/main" xmlns:r="http://schemas.openxmlformats.org/officeDocument/2006/relationships">
+  <p:cSld>
+    <p:bg>
+      <p:bgPr>
+        <a:solidFill>
+          <a:srgbClr val="FBF7EF"/>
+        </a:solidFill>
+        <a:effectLst/>
+      </p:bgPr>
+    </p:bg>
+    <p:spTree>
+      <p:nvGrpSpPr>
+        <p:cNvPr id="1" name=""/>
+        <p:cNvGrpSpPr/>
+        <p:nvPr/>
+      </p:nvGrpSpPr>
+      <p:grpSpPr/>
+      <p:sp>
+        <p:nvSpPr>
+          <p:cNvPr id="2" name="TextBox 1"/>
+          <p:cNvSpPr txBox="1"/>
+          <p:nvPr/>
+        </p:nvSpPr>
+        <p:spPr>
+          <a:xfrm>
+            <a:off x="640000" y="380000"/>
+            <a:ext cx="10912000" cy="420000"/>
+          </a:xfrm>
+          <a:prstGeom prst="rect">
+            <a:avLst/>
+          </a:prstGeom>
+          <a:noFill/>
+        </p:spPr>
+        <p:txBody>
+          <a:bodyPr wrap="square">
+            <a:spAutoFit/>
+          </a:bodyPr>
+          <a:lstStyle/>
+          <a:p>
+            <a:pPr>
+              <a:spcAft>
+                <a:spcPts val="630"/>
+              </a:spcAft>
+            </a:pPr>
+            <a:r>
+              <a:rPr sz="1400" b="1">
+                <a:solidFill>
+                  <a:srgbClr val="E8793A"/>
+                </a:solidFill>
+                <a:latin typeface="Nunito Sans"/>
+              </a:rPr>
+              <a:t>BLOQUE 1 · UN MUNDO CONECTADO</a:t>
+            </a:r>
+          </a:p>
+        </p:txBody>
+      </p:sp>
+      <p:sp>
+        <p:nvSpPr>
+          <p:cNvPr id="3" name="TextBox 2"/>
+          <p:cNvSpPr txBox="1"/>
+          <p:nvPr/>
+        </p:nvSpPr>
+        <p:spPr>
+          <a:xfrm>
+            <a:off x="640000" y="760000"/>
+            <a:ext cx="10912000" cy="800000"/>
+          </a:xfrm>
+          <a:prstGeom prst="rect">
+            <a:avLst/>
+          </a:prstGeom>
+          <a:noFill/>
+        </p:spPr>
+        <p:txBody>
+          <a:bodyPr wrap="square">
+            <a:spAutoFit/>
+          </a:bodyPr>
+          <a:lstStyle/>
+          <a:p>
+            <a:pPr>
+              <a:spcAft>
+                <a:spcPts val="1710"/>
+              </a:spcAft>
+            </a:pPr>
+            <a:r>
+              <a:rPr sz="3800" b="1">
+                <a:solidFill>
+                  <a:srgbClr val="1F2A44"/>
+                </a:solidFill>
+                <a:latin typeface="Fredoka"/>
+              </a:rPr>
+              <a:t>Los humanos siempre hemos migrado</a:t>
+            </a:r>
+          </a:p>
+        </p:txBody>
+      </p:sp>
+      <p:sp>
+        <p:nvSpPr>
+          <p:cNvPr id="4" name="TextBox 3"/>
+          <p:cNvSpPr txBox="1"/>
+          <p:nvPr/>
+        </p:nvSpPr>
+        <p:spPr>
+          <a:xfrm>
+            <a:off x="640000" y="1650000"/>
+            <a:ext cx="10912000" cy="4808000"/>
+          </a:xfrm>
+          <a:prstGeom prst="rect">
+            <a:avLst/>
+          </a:prstGeom>
+          <a:noFill/>
+        </p:spPr>
+        <p:txBody>
+          <a:bodyPr wrap="square">
+            <a:spAutoFit/>
+          </a:bodyPr>
+          <a:lstStyle/>
+          <a:p>
+            <a:pPr>
+              <a:spcAft>
+                <a:spcPts val="1260"/>
+              </a:spcAft>
+            </a:pPr>
+            <a:r>
+              <a:rPr sz="2800" b="1">
+                <a:solidFill>
+                  <a:srgbClr val="E8793A"/>
+                </a:solidFill>
+                <a:latin typeface="Nunito Sans"/>
+              </a:rPr>
+              <a:t>• </a:t>
+            </a:r>
+            <a:r>
+              <a:rPr sz="2800" b="0">
+                <a:solidFill>
+                  <a:srgbClr val="1F2A44"/>
+                </a:solidFill>
+                <a:latin typeface="Nunito Sans"/>
+              </a:rPr>
+              <a:t>Nuestra especie nació en </a:t>
+            </a:r>
+            <a:r>
+              <a:rPr sz="2800" b="1">
+                <a:solidFill>
+                  <a:srgbClr val="1F2A44"/>
+                </a:solidFill>
+                <a:latin typeface="Nunito Sans"/>
+              </a:rPr>
+              <a:t>África</a:t>
+            </a:r>
+            <a:r>
+              <a:rPr sz="2800" b="0">
+                <a:solidFill>
+                  <a:srgbClr val="1F2A44"/>
+                </a:solidFill>
+                <a:latin typeface="Nunito Sans"/>
+              </a:rPr>
+              <a:t> y desde allí llegó a todo el planeta.</a:t>
+            </a:r>
+          </a:p>
+          <a:p>
+            <a:pPr>
+              <a:spcAft>
+                <a:spcPts val="1260"/>
+              </a:spcAft>
+            </a:pPr>
+            <a:r>
+              <a:rPr sz="2800" b="1">
+                <a:solidFill>
+                  <a:srgbClr val="E8793A"/>
+                </a:solidFill>
+                <a:latin typeface="Nunito Sans"/>
+              </a:rPr>
+              <a:t>• </a:t>
+            </a:r>
+            <a:r>
+              <a:rPr sz="2800" b="0">
+                <a:solidFill>
+                  <a:srgbClr val="1F2A44"/>
+                </a:solidFill>
+                <a:latin typeface="Nunito Sans"/>
+              </a:rPr>
+              <a:t>Siglos XIX y XX: muchos vascos emigraron a </a:t>
+            </a:r>
+            <a:r>
+              <a:rPr sz="2800" b="1">
+                <a:solidFill>
+                  <a:srgbClr val="1F2A44"/>
+                </a:solidFill>
+                <a:latin typeface="Nunito Sans"/>
+              </a:rPr>
+              <a:t>América</a:t>
+            </a:r>
+            <a:r>
+              <a:rPr sz="2800" b="0">
+                <a:solidFill>
+                  <a:srgbClr val="1F2A44"/>
+                </a:solidFill>
+                <a:latin typeface="Nunito Sans"/>
+              </a:rPr>
+              <a:t> (Argentina, Uruguay, Chile, Estados Unidos…).</a:t>
+            </a:r>
+          </a:p>
+          <a:p>
+            <a:pPr>
+              <a:spcAft>
+                <a:spcPts val="1260"/>
+              </a:spcAft>
+            </a:pPr>
+            <a:r>
+              <a:rPr sz="2800" b="1">
+                <a:solidFill>
+                  <a:srgbClr val="E8793A"/>
+                </a:solidFill>
+                <a:latin typeface="Nunito Sans"/>
+              </a:rPr>
+              <a:t>• </a:t>
+            </a:r>
+            <a:r>
+              <a:rPr sz="2800" b="0">
+                <a:solidFill>
+                  <a:srgbClr val="1F2A44"/>
+                </a:solidFill>
+                <a:latin typeface="Nunito Sans"/>
+              </a:rPr>
+              <a:t>Siglo XX: a Bilbao llegó gente de toda España a trabajar en fábricas.</a:t>
+            </a:r>
+          </a:p>
+          <a:p>
+            <a:pPr>
+              <a:spcAft>
+                <a:spcPts val="1260"/>
+              </a:spcAft>
+            </a:pPr>
+            <a:r>
+              <a:rPr sz="2800" b="1">
+                <a:solidFill>
+                  <a:srgbClr val="E8793A"/>
+                </a:solidFill>
+                <a:latin typeface="Nunito Sans"/>
+              </a:rPr>
+              <a:t>• </a:t>
+            </a:r>
+            <a:r>
+              <a:rPr sz="2800" b="0">
+                <a:solidFill>
+                  <a:srgbClr val="1F2A44"/>
+                </a:solidFill>
+                <a:latin typeface="Nunito Sans"/>
+              </a:rPr>
+              <a:t>Hoy llega gente de todo el mundo, y también se van jóvenes vascos.</a:t>
+            </a:r>
+          </a:p>
+        </p:txBody>
+      </p:sp>
+    </p:spTree>
+  </p:cSld>
+  <p:clrMapOvr>
+    <a:masterClrMapping/>
+  </p:clrMapOvr>
+</p:sld>
+</file>
+
+<file path=ppt/slides/slide11.xml><?xml version="1.0" encoding="utf-8"?>
 <p:sld xmlns:a="http://schemas.openxmlformats.org/drawingml/2006/main" xmlns:p="http://schemas.openxmlformats.org/presentationml/2006/main" xmlns:r="http://schemas.openxmlformats.org/officeDocument/2006/relationships">
   <p:cSld>
     <p:bg>
@@ -3717,370 +3981,7 @@
                 </a:solidFill>
                 <a:latin typeface="Fredoka"/>
               </a:rPr>
-              <a:t>Leer bien los datos</a:t>
-            </a:r>
-          </a:p>
-        </p:txBody>
-      </p:sp>
-    </p:spTree>
-  </p:cSld>
-  <p:clrMapOvr>
-    <a:masterClrMapping/>
-  </p:clrMapOvr>
-</p:sld>
-</file>
-
-<file path=ppt/slides/slide11.xml><?xml version="1.0" encoding="utf-8"?>
-<p:sld xmlns:a="http://schemas.openxmlformats.org/drawingml/2006/main" xmlns:p="http://schemas.openxmlformats.org/presentationml/2006/main" xmlns:r="http://schemas.openxmlformats.org/officeDocument/2006/relationships">
-  <p:cSld>
-    <p:bg>
-      <p:bgPr>
-        <a:solidFill>
-          <a:srgbClr val="FBF7EF"/>
-        </a:solidFill>
-        <a:effectLst/>
-      </p:bgPr>
-    </p:bg>
-    <p:spTree>
-      <p:nvGrpSpPr>
-        <p:cNvPr id="1" name=""/>
-        <p:cNvGrpSpPr/>
-        <p:nvPr/>
-      </p:nvGrpSpPr>
-      <p:grpSpPr/>
-      <p:sp>
-        <p:nvSpPr>
-          <p:cNvPr id="2" name="TextBox 1"/>
-          <p:cNvSpPr txBox="1"/>
-          <p:nvPr/>
-        </p:nvSpPr>
-        <p:spPr>
-          <a:xfrm>
-            <a:off x="640000" y="380000"/>
-            <a:ext cx="10912000" cy="420000"/>
-          </a:xfrm>
-          <a:prstGeom prst="rect">
-            <a:avLst/>
-          </a:prstGeom>
-          <a:noFill/>
-        </p:spPr>
-        <p:txBody>
-          <a:bodyPr wrap="square">
-            <a:spAutoFit/>
-          </a:bodyPr>
-          <a:lstStyle/>
-          <a:p>
-            <a:pPr>
-              <a:spcAft>
-                <a:spcPts val="630"/>
-              </a:spcAft>
-            </a:pPr>
-            <a:r>
-              <a:rPr sz="1400" b="1">
-                <a:solidFill>
-                  <a:srgbClr val="E8793A"/>
-                </a:solidFill>
-                <a:latin typeface="Nunito Sans"/>
-              </a:rPr>
-              <a:t>BLOQUE 2 · LEER BIEN LOS DATOS</a:t>
-            </a:r>
-          </a:p>
-        </p:txBody>
-      </p:sp>
-      <p:sp>
-        <p:nvSpPr>
-          <p:cNvPr id="3" name="TextBox 2"/>
-          <p:cNvSpPr txBox="1"/>
-          <p:nvPr/>
-        </p:nvSpPr>
-        <p:spPr>
-          <a:xfrm>
-            <a:off x="640000" y="760000"/>
-            <a:ext cx="10912000" cy="800000"/>
-          </a:xfrm>
-          <a:prstGeom prst="rect">
-            <a:avLst/>
-          </a:prstGeom>
-          <a:noFill/>
-        </p:spPr>
-        <p:txBody>
-          <a:bodyPr wrap="square">
-            <a:spAutoFit/>
-          </a:bodyPr>
-          <a:lstStyle/>
-          <a:p>
-            <a:pPr>
-              <a:spcAft>
-                <a:spcPts val="1710"/>
-              </a:spcAft>
-            </a:pPr>
-            <a:r>
-              <a:rPr sz="3800" b="1">
-                <a:solidFill>
-                  <a:srgbClr val="1F2A44"/>
-                </a:solidFill>
-                <a:latin typeface="Fredoka"/>
-              </a:rPr>
-              <a:t>Caso 1 · ¿Cobran menos por el mismo trabajo?</a:t>
-            </a:r>
-          </a:p>
-        </p:txBody>
-      </p:sp>
-      <p:sp>
-        <p:nvSpPr>
-          <p:cNvPr id="4" name="Rectangle 3"/>
-          <p:cNvSpPr/>
-          <p:nvPr/>
-        </p:nvSpPr>
-        <p:spPr>
-          <a:xfrm>
-            <a:off x="640000" y="1600000"/>
-            <a:ext cx="10912000" cy="1100000"/>
-          </a:xfrm>
-          <a:prstGeom prst="rect">
-            <a:avLst/>
-          </a:prstGeom>
-          <a:solidFill>
-            <a:srgbClr val="FFFFFF"/>
-          </a:solidFill>
-          <a:ln>
-            <a:noFill/>
-          </a:ln>
-        </p:spPr>
-        <p:style>
-          <a:lnRef idx="1">
-            <a:schemeClr val="accent1"/>
-          </a:lnRef>
-          <a:fillRef idx="3">
-            <a:schemeClr val="accent1"/>
-          </a:fillRef>
-          <a:effectRef idx="2">
-            <a:schemeClr val="accent1"/>
-          </a:effectRef>
-          <a:fontRef idx="minor">
-            <a:schemeClr val="lt1"/>
-          </a:fontRef>
-        </p:style>
-        <p:txBody>
-          <a:bodyPr rtlCol="0" anchor="ctr"/>
-          <a:lstStyle/>
-          <a:p>
-            <a:pPr algn="ctr"/>
-          </a:p>
-        </p:txBody>
-      </p:sp>
-      <p:sp>
-        <p:nvSpPr>
-          <p:cNvPr id="5" name="TextBox 4"/>
-          <p:cNvSpPr txBox="1"/>
-          <p:nvPr/>
-        </p:nvSpPr>
-        <p:spPr>
-          <a:xfrm>
-            <a:off x="840000" y="1650000"/>
-            <a:ext cx="10512000" cy="1000000"/>
-          </a:xfrm>
-          <a:prstGeom prst="rect">
-            <a:avLst/>
-          </a:prstGeom>
-          <a:noFill/>
-        </p:spPr>
-        <p:txBody>
-          <a:bodyPr wrap="square" anchor="ctr">
-            <a:spAutoFit/>
-          </a:bodyPr>
-          <a:lstStyle/>
-          <a:p>
-            <a:pPr>
-              <a:spcAft>
-                <a:spcPts val="1170"/>
-              </a:spcAft>
-            </a:pPr>
-            <a:r>
-              <a:rPr sz="2600" b="1">
-                <a:solidFill>
-                  <a:srgbClr val="1F2A44"/>
-                </a:solidFill>
-                <a:latin typeface="Nunito Sans"/>
-              </a:rPr>
-              <a:t>Una chica lee: «Las mujeres cobran de media menos que los hombres». Concluye: «Entonces a mi madre le pagan menos que a su compañero por hacer lo mismo».</a:t>
-            </a:r>
-          </a:p>
-        </p:txBody>
-      </p:sp>
-      <p:sp>
-        <p:nvSpPr>
-          <p:cNvPr id="6" name="TextBox 5"/>
-          <p:cNvSpPr txBox="1"/>
-          <p:nvPr/>
-        </p:nvSpPr>
-        <p:spPr>
-          <a:xfrm>
-            <a:off x="640000" y="2900000"/>
-            <a:ext cx="10912000" cy="3500000"/>
-          </a:xfrm>
-          <a:prstGeom prst="rect">
-            <a:avLst/>
-          </a:prstGeom>
-          <a:noFill/>
-        </p:spPr>
-        <p:txBody>
-          <a:bodyPr wrap="square">
-            <a:spAutoFit/>
-          </a:bodyPr>
-          <a:lstStyle/>
-          <a:p>
-            <a:pPr>
-              <a:spcAft>
-                <a:spcPts val="1080"/>
-              </a:spcAft>
-            </a:pPr>
-            <a:r>
-              <a:rPr sz="2400" b="1">
-                <a:solidFill>
-                  <a:srgbClr val="E8793A"/>
-                </a:solidFill>
-                <a:latin typeface="Nunito Sans"/>
-              </a:rPr>
-              <a:t>1. </a:t>
-            </a:r>
-            <a:r>
-              <a:rPr sz="2400" b="0">
-                <a:solidFill>
-                  <a:srgbClr val="1F2A44"/>
-                </a:solidFill>
-                <a:latin typeface="Nunito Sans"/>
-              </a:rPr>
-              <a:t>La media compara a </a:t>
-            </a:r>
-            <a:r>
-              <a:rPr sz="2400" b="1">
-                <a:solidFill>
-                  <a:srgbClr val="1F2A44"/>
-                </a:solidFill>
-                <a:latin typeface="Nunito Sans"/>
-              </a:rPr>
-              <a:t>todas</a:t>
-            </a:r>
-            <a:r>
-              <a:rPr sz="2400" b="0">
-                <a:solidFill>
-                  <a:srgbClr val="1F2A44"/>
-                </a:solidFill>
-                <a:latin typeface="Nunito Sans"/>
-              </a:rPr>
-              <a:t> las mujeres con </a:t>
-            </a:r>
-            <a:r>
-              <a:rPr sz="2400" b="1">
-                <a:solidFill>
-                  <a:srgbClr val="1F2A44"/>
-                </a:solidFill>
-                <a:latin typeface="Nunito Sans"/>
-              </a:rPr>
-              <a:t>todos</a:t>
-            </a:r>
-            <a:r>
-              <a:rPr sz="2400" b="0">
-                <a:solidFill>
-                  <a:srgbClr val="1F2A44"/>
-                </a:solidFill>
-                <a:latin typeface="Nunito Sans"/>
-              </a:rPr>
-              <a:t> los hombres, no el mismo puesto (sesión 41).</a:t>
-            </a:r>
-          </a:p>
-          <a:p>
-            <a:pPr>
-              <a:spcAft>
-                <a:spcPts val="1080"/>
-              </a:spcAft>
-            </a:pPr>
-            <a:r>
-              <a:rPr sz="2400" b="1">
-                <a:solidFill>
-                  <a:srgbClr val="E8793A"/>
-                </a:solidFill>
-                <a:latin typeface="Nunito Sans"/>
-              </a:rPr>
-              <a:t>2. </a:t>
-            </a:r>
-            <a:r>
-              <a:rPr sz="2400" b="0">
-                <a:solidFill>
-                  <a:srgbClr val="1F2A44"/>
-                </a:solidFill>
-                <a:latin typeface="Nunito Sans"/>
-              </a:rPr>
-              <a:t>Pagar distinto por el mismo trabajo está </a:t>
-            </a:r>
-            <a:r>
-              <a:rPr sz="2400" b="1">
-                <a:solidFill>
-                  <a:srgbClr val="1F2A44"/>
-                </a:solidFill>
-                <a:latin typeface="Nunito Sans"/>
-              </a:rPr>
-              <a:t>prohibido</a:t>
-            </a:r>
-            <a:r>
-              <a:rPr sz="2400" b="0">
-                <a:solidFill>
-                  <a:srgbClr val="1F2A44"/>
-                </a:solidFill>
-                <a:latin typeface="Nunito Sans"/>
-              </a:rPr>
-              <a:t> por ley en España. Si pasa, se puede denunciar.</a:t>
-            </a:r>
-          </a:p>
-          <a:p>
-            <a:pPr>
-              <a:spcAft>
-                <a:spcPts val="1080"/>
-              </a:spcAft>
-            </a:pPr>
-            <a:r>
-              <a:rPr sz="2400" b="1">
-                <a:solidFill>
-                  <a:srgbClr val="E8793A"/>
-                </a:solidFill>
-                <a:latin typeface="Nunito Sans"/>
-              </a:rPr>
-              <a:t>3. </a:t>
-            </a:r>
-            <a:r>
-              <a:rPr sz="2400" b="0">
-                <a:solidFill>
-                  <a:srgbClr val="1F2A44"/>
-                </a:solidFill>
-                <a:latin typeface="Nunito Sans"/>
-              </a:rPr>
-              <a:t>La diferencia de media sale de varias causas: más jornada parcial, trabajos peor pagados, parones para cuidar… y a veces discriminación.</a:t>
-            </a:r>
-          </a:p>
-          <a:p>
-            <a:pPr>
-              <a:spcAft>
-                <a:spcPts val="1080"/>
-              </a:spcAft>
-            </a:pPr>
-            <a:r>
-              <a:rPr sz="2400" b="1">
-                <a:solidFill>
-                  <a:srgbClr val="E8793A"/>
-                </a:solidFill>
-                <a:latin typeface="Nunito Sans"/>
-              </a:rPr>
-              <a:t>4. </a:t>
-            </a:r>
-            <a:r>
-              <a:rPr sz="2400" b="0">
-                <a:solidFill>
-                  <a:srgbClr val="1F2A44"/>
-                </a:solidFill>
-                <a:latin typeface="Nunito Sans"/>
-              </a:rPr>
-              <a:t>Conclusión: el dato es real y muestra desigualdad. Pero no dice qué pasa en un caso concreto.</a:t>
+              <a:t>Casos resueltos</a:t>
             </a:r>
           </a:p>
         </p:txBody>
@@ -4145,7 +4046,7 @@
                 </a:solidFill>
                 <a:latin typeface="Nunito Sans"/>
               </a:rPr>
-              <a:t>BLOQUE 2 · LEER BIEN LOS DATOS</a:t>
+              <a:t>BLOQUE 2 · CASOS RESUELTOS</a:t>
             </a:r>
           </a:p>
         </p:txBody>
@@ -4184,7 +4085,7 @@
                 </a:solidFill>
                 <a:latin typeface="Fredoka"/>
               </a:rPr>
-              <a:t>Caso 2 · Una diferencia pide un porqué</a:t>
+              <a:t>Caso 1 · Un mensaje en la familia</a:t>
             </a:r>
           </a:p>
         </p:txBody>
@@ -4266,7 +4167,7 @@
                 </a:solidFill>
                 <a:latin typeface="Nunito Sans"/>
               </a:rPr>
-              <a:t>En un instituto, 9 de cada 10 alumnos del ciclo de Informática son chicos (ejemplo inventado).</a:t>
+              <a:t>Al grupo de la familia de un chico llega: «¡URGENTE! A los inmigrantes les dan miles de euros solo por llegar. Lo ha dicho un amigo que trabaja en el ayuntamiento. ¡Pásalo!».</a:t>
             </a:r>
           </a:p>
         </p:txBody>
@@ -4314,16 +4215,48 @@
                 </a:solidFill>
                 <a:latin typeface="Nunito Sans"/>
               </a:rPr>
-              <a:t>El dato no se explica solo. Como en las sesiones 22 y 40: ¿cuál es la </a:t>
-            </a:r>
+              <a:t>Tiene los ingredientes de un bulo (sesión 34): urgencia, emoción fuerte y fuente vaga.</a:t>
+            </a:r>
+          </a:p>
+          <a:p>
+            <a:pPr>
+              <a:spcAft>
+                <a:spcPts val="1080"/>
+              </a:spcAft>
+            </a:pPr>
             <a:r>
               <a:rPr sz="2400" b="1">
                 <a:solidFill>
+                  <a:srgbClr val="E8793A"/>
+                </a:solidFill>
+                <a:latin typeface="Nunito Sans"/>
+              </a:rPr>
+              <a:t>2. </a:t>
+            </a:r>
+            <a:r>
+              <a:rPr sz="2400" b="0">
+                <a:solidFill>
                   <a:srgbClr val="1F2A44"/>
                 </a:solidFill>
                 <a:latin typeface="Nunito Sans"/>
               </a:rPr>
-              <a:t>causa</a:t>
+              <a:t>¿Quién lo dice? «Un amigo». ¿Cómo lo sabe? No lo explica. No hay fuente fiable (sesión 32).</a:t>
+            </a:r>
+          </a:p>
+          <a:p>
+            <a:pPr>
+              <a:spcAft>
+                <a:spcPts val="1080"/>
+              </a:spcAft>
+            </a:pPr>
+            <a:r>
+              <a:rPr sz="2400" b="1">
+                <a:solidFill>
+                  <a:srgbClr val="E8793A"/>
+                </a:solidFill>
+                <a:latin typeface="Nunito Sans"/>
+              </a:rPr>
+              <a:t>3. </a:t>
             </a:r>
             <a:r>
               <a:rPr sz="2400" b="0">
@@ -4332,7 +4265,7 @@
                 </a:solidFill>
                 <a:latin typeface="Nunito Sans"/>
               </a:rPr>
-              <a:t>?</a:t>
+              <a:t>Da una cifra sin decir de dónde sale. Antes de creerla, hay que buscarla en fuentes fiables.</a:t>
             </a:r>
           </a:p>
           <a:p>
@@ -4348,7 +4281,7 @@
                 </a:solidFill>
                 <a:latin typeface="Nunito Sans"/>
               </a:rPr>
-              <a:t>2. </a:t>
+              <a:t>4. </a:t>
             </a:r>
             <a:r>
               <a:rPr sz="2400" b="0">
@@ -4357,57 +4290,7 @@
                 </a:solidFill>
                 <a:latin typeface="Nunito Sans"/>
               </a:rPr>
-              <a:t>¿Que a las chicas «no se les da»? Eso sería un estereotipo, sin pruebas.</a:t>
-            </a:r>
-          </a:p>
-          <a:p>
-            <a:pPr>
-              <a:spcAft>
-                <a:spcPts val="1080"/>
-              </a:spcAft>
-            </a:pPr>
-            <a:r>
-              <a:rPr sz="2400" b="1">
-                <a:solidFill>
-                  <a:srgbClr val="E8793A"/>
-                </a:solidFill>
-                <a:latin typeface="Nunito Sans"/>
-              </a:rPr>
-              <a:t>3. </a:t>
-            </a:r>
-            <a:r>
-              <a:rPr sz="2400" b="0">
-                <a:solidFill>
-                  <a:srgbClr val="1F2A44"/>
-                </a:solidFill>
-                <a:latin typeface="Nunito Sans"/>
-              </a:rPr>
-              <a:t>Otras causas posibles: pocas informáticas conocidas, comentarios en casa, miedo a ser «la única».</a:t>
-            </a:r>
-          </a:p>
-          <a:p>
-            <a:pPr>
-              <a:spcAft>
-                <a:spcPts val="1080"/>
-              </a:spcAft>
-            </a:pPr>
-            <a:r>
-              <a:rPr sz="2400" b="1">
-                <a:solidFill>
-                  <a:srgbClr val="E8793A"/>
-                </a:solidFill>
-                <a:latin typeface="Nunito Sans"/>
-              </a:rPr>
-              <a:t>4. </a:t>
-            </a:r>
-            <a:r>
-              <a:rPr sz="2400" b="0">
-                <a:solidFill>
-                  <a:srgbClr val="1F2A44"/>
-                </a:solidFill>
-                <a:latin typeface="Nunito Sans"/>
-              </a:rPr>
-              <a:t>Conclusión: ante una diferencia, no saltes a la primera explicación. Pregunta por qué y busca pruebas.</a:t>
+              <a:t>Conclusión: son señales de bulo. No se reenvía hasta comprobarlo.</a:t>
             </a:r>
           </a:p>
         </p:txBody>
@@ -4421,6 +4304,315 @@
 </file>
 
 <file path=ppt/slides/slide13.xml><?xml version="1.0" encoding="utf-8"?>
+<p:sld xmlns:a="http://schemas.openxmlformats.org/drawingml/2006/main" xmlns:p="http://schemas.openxmlformats.org/presentationml/2006/main" xmlns:r="http://schemas.openxmlformats.org/officeDocument/2006/relationships">
+  <p:cSld>
+    <p:bg>
+      <p:bgPr>
+        <a:solidFill>
+          <a:srgbClr val="FBF7EF"/>
+        </a:solidFill>
+        <a:effectLst/>
+      </p:bgPr>
+    </p:bg>
+    <p:spTree>
+      <p:nvGrpSpPr>
+        <p:cNvPr id="1" name=""/>
+        <p:cNvGrpSpPr/>
+        <p:nvPr/>
+      </p:nvGrpSpPr>
+      <p:grpSpPr/>
+      <p:sp>
+        <p:nvSpPr>
+          <p:cNvPr id="2" name="TextBox 1"/>
+          <p:cNvSpPr txBox="1"/>
+          <p:nvPr/>
+        </p:nvSpPr>
+        <p:spPr>
+          <a:xfrm>
+            <a:off x="640000" y="380000"/>
+            <a:ext cx="10912000" cy="420000"/>
+          </a:xfrm>
+          <a:prstGeom prst="rect">
+            <a:avLst/>
+          </a:prstGeom>
+          <a:noFill/>
+        </p:spPr>
+        <p:txBody>
+          <a:bodyPr wrap="square">
+            <a:spAutoFit/>
+          </a:bodyPr>
+          <a:lstStyle/>
+          <a:p>
+            <a:pPr>
+              <a:spcAft>
+                <a:spcPts val="630"/>
+              </a:spcAft>
+            </a:pPr>
+            <a:r>
+              <a:rPr sz="1400" b="1">
+                <a:solidFill>
+                  <a:srgbClr val="E8793A"/>
+                </a:solidFill>
+                <a:latin typeface="Nunito Sans"/>
+              </a:rPr>
+              <a:t>BLOQUE 2 · CASOS RESUELTOS</a:t>
+            </a:r>
+          </a:p>
+        </p:txBody>
+      </p:sp>
+      <p:sp>
+        <p:nvSpPr>
+          <p:cNvPr id="3" name="TextBox 2"/>
+          <p:cNvSpPr txBox="1"/>
+          <p:nvPr/>
+        </p:nvSpPr>
+        <p:spPr>
+          <a:xfrm>
+            <a:off x="640000" y="760000"/>
+            <a:ext cx="10912000" cy="800000"/>
+          </a:xfrm>
+          <a:prstGeom prst="rect">
+            <a:avLst/>
+          </a:prstGeom>
+          <a:noFill/>
+        </p:spPr>
+        <p:txBody>
+          <a:bodyPr wrap="square">
+            <a:spAutoFit/>
+          </a:bodyPr>
+          <a:lstStyle/>
+          <a:p>
+            <a:pPr>
+              <a:spcAft>
+                <a:spcPts val="1710"/>
+              </a:spcAft>
+            </a:pPr>
+            <a:r>
+              <a:rPr sz="3800" b="1">
+                <a:solidFill>
+                  <a:srgbClr val="1F2A44"/>
+                </a:solidFill>
+                <a:latin typeface="Fredoka"/>
+              </a:rPr>
+              <a:t>Caso 2 · «Lo que yo decía»</a:t>
+            </a:r>
+          </a:p>
+        </p:txBody>
+      </p:sp>
+      <p:sp>
+        <p:nvSpPr>
+          <p:cNvPr id="4" name="Rectangle 3"/>
+          <p:cNvSpPr/>
+          <p:nvPr/>
+        </p:nvSpPr>
+        <p:spPr>
+          <a:xfrm>
+            <a:off x="640000" y="1600000"/>
+            <a:ext cx="10912000" cy="1100000"/>
+          </a:xfrm>
+          <a:prstGeom prst="rect">
+            <a:avLst/>
+          </a:prstGeom>
+          <a:solidFill>
+            <a:srgbClr val="FFFFFF"/>
+          </a:solidFill>
+          <a:ln>
+            <a:noFill/>
+          </a:ln>
+        </p:spPr>
+        <p:style>
+          <a:lnRef idx="1">
+            <a:schemeClr val="accent1"/>
+          </a:lnRef>
+          <a:fillRef idx="3">
+            <a:schemeClr val="accent1"/>
+          </a:fillRef>
+          <a:effectRef idx="2">
+            <a:schemeClr val="accent1"/>
+          </a:effectRef>
+          <a:fontRef idx="minor">
+            <a:schemeClr val="lt1"/>
+          </a:fontRef>
+        </p:style>
+        <p:txBody>
+          <a:bodyPr rtlCol="0" anchor="ctr"/>
+          <a:lstStyle/>
+          <a:p>
+            <a:pPr algn="ctr"/>
+          </a:p>
+        </p:txBody>
+      </p:sp>
+      <p:sp>
+        <p:nvSpPr>
+          <p:cNvPr id="5" name="TextBox 4"/>
+          <p:cNvSpPr txBox="1"/>
+          <p:nvPr/>
+        </p:nvSpPr>
+        <p:spPr>
+          <a:xfrm>
+            <a:off x="840000" y="1650000"/>
+            <a:ext cx="10512000" cy="1000000"/>
+          </a:xfrm>
+          <a:prstGeom prst="rect">
+            <a:avLst/>
+          </a:prstGeom>
+          <a:noFill/>
+        </p:spPr>
+        <p:txBody>
+          <a:bodyPr wrap="square" anchor="ctr">
+            <a:spAutoFit/>
+          </a:bodyPr>
+          <a:lstStyle/>
+          <a:p>
+            <a:pPr>
+              <a:spcAft>
+                <a:spcPts val="1170"/>
+              </a:spcAft>
+            </a:pPr>
+            <a:r>
+              <a:rPr sz="2600" b="1">
+                <a:solidFill>
+                  <a:srgbClr val="1F2A44"/>
+                </a:solidFill>
+                <a:latin typeface="Nunito Sans"/>
+              </a:rPr>
+              <a:t>Frase inventada, de las que se oyen por ahí. Vamos a ver por qué falla. Un chico lee una noticia sobre un robo. El detenido nació en otro país. Ese chico comenta: «Lo que yo decía: los de fuera vienen a robar».</a:t>
+            </a:r>
+          </a:p>
+        </p:txBody>
+      </p:sp>
+      <p:sp>
+        <p:nvSpPr>
+          <p:cNvPr id="6" name="TextBox 5"/>
+          <p:cNvSpPr txBox="1"/>
+          <p:nvPr/>
+        </p:nvSpPr>
+        <p:spPr>
+          <a:xfrm>
+            <a:off x="640000" y="2900000"/>
+            <a:ext cx="10912000" cy="3500000"/>
+          </a:xfrm>
+          <a:prstGeom prst="rect">
+            <a:avLst/>
+          </a:prstGeom>
+          <a:noFill/>
+        </p:spPr>
+        <p:txBody>
+          <a:bodyPr wrap="square">
+            <a:spAutoFit/>
+          </a:bodyPr>
+          <a:lstStyle/>
+          <a:p>
+            <a:pPr>
+              <a:spcAft>
+                <a:spcPts val="1080"/>
+              </a:spcAft>
+            </a:pPr>
+            <a:r>
+              <a:rPr sz="2400" b="1">
+                <a:solidFill>
+                  <a:srgbClr val="E8793A"/>
+                </a:solidFill>
+                <a:latin typeface="Nunito Sans"/>
+              </a:rPr>
+              <a:t>1. </a:t>
+            </a:r>
+            <a:r>
+              <a:rPr sz="2400" b="0">
+                <a:solidFill>
+                  <a:srgbClr val="1F2A44"/>
+                </a:solidFill>
+                <a:latin typeface="Nunito Sans"/>
+              </a:rPr>
+              <a:t>De un caso saca una conclusión sobre todos: generalización apresurada (sesión 25).</a:t>
+            </a:r>
+          </a:p>
+          <a:p>
+            <a:pPr>
+              <a:spcAft>
+                <a:spcPts val="1080"/>
+              </a:spcAft>
+            </a:pPr>
+            <a:r>
+              <a:rPr sz="2400" b="1">
+                <a:solidFill>
+                  <a:srgbClr val="E8793A"/>
+                </a:solidFill>
+                <a:latin typeface="Nunito Sans"/>
+              </a:rPr>
+              <a:t>2. </a:t>
+            </a:r>
+            <a:r>
+              <a:rPr sz="2400" b="0">
+                <a:solidFill>
+                  <a:srgbClr val="1F2A44"/>
+                </a:solidFill>
+                <a:latin typeface="Nunito Sans"/>
+              </a:rPr>
+              <a:t>¿Cuántos casos ha mirado? Uno. En Bilbao viven muchísimas personas de fuera que trabajan y estudian.</a:t>
+            </a:r>
+          </a:p>
+          <a:p>
+            <a:pPr>
+              <a:spcAft>
+                <a:spcPts val="1080"/>
+              </a:spcAft>
+            </a:pPr>
+            <a:r>
+              <a:rPr sz="2400" b="1">
+                <a:solidFill>
+                  <a:srgbClr val="E8793A"/>
+                </a:solidFill>
+                <a:latin typeface="Nunito Sans"/>
+              </a:rPr>
+              <a:t>3. </a:t>
+            </a:r>
+            <a:r>
+              <a:rPr sz="2400" b="0">
+                <a:solidFill>
+                  <a:srgbClr val="1F2A44"/>
+                </a:solidFill>
+                <a:latin typeface="Nunito Sans"/>
+              </a:rPr>
+              <a:t>«Lo que yo decía»: se fija en lo que confirma su idea (sesión 45).</a:t>
+            </a:r>
+          </a:p>
+          <a:p>
+            <a:pPr>
+              <a:spcAft>
+                <a:spcPts val="1080"/>
+              </a:spcAft>
+            </a:pPr>
+            <a:r>
+              <a:rPr sz="2400" b="1">
+                <a:solidFill>
+                  <a:srgbClr val="E8793A"/>
+                </a:solidFill>
+                <a:latin typeface="Nunito Sans"/>
+              </a:rPr>
+              <a:t>4. </a:t>
+            </a:r>
+            <a:r>
+              <a:rPr sz="2400" b="0">
+                <a:solidFill>
+                  <a:srgbClr val="1F2A44"/>
+                </a:solidFill>
+                <a:latin typeface="Nunito Sans"/>
+              </a:rPr>
+              <a:t>Conclusión: un caso no dice nada de todo un grupo. Cada persona responde de lo que hace.</a:t>
+            </a:r>
+          </a:p>
+        </p:txBody>
+      </p:sp>
+    </p:spTree>
+  </p:cSld>
+  <p:clrMapOvr>
+    <a:masterClrMapping/>
+  </p:clrMapOvr>
+</p:sld>
+</file>
+
+<file path=ppt/slides/slide14.xml><?xml version="1.0" encoding="utf-8"?>
 <p:sld xmlns:a="http://schemas.openxmlformats.org/drawingml/2006/main" xmlns:p="http://schemas.openxmlformats.org/presentationml/2006/main" xmlns:r="http://schemas.openxmlformats.org/officeDocument/2006/relationships">
   <p:cSld>
     <p:bg>
@@ -4472,7 +4664,7 @@
                 </a:solidFill>
                 <a:latin typeface="Nunito Sans"/>
               </a:rPr>
-              <a:t>CASO TRAMPA · BLOQUE 2 · LEER BIEN LOS DATOS</a:t>
+              <a:t>CASO TRAMPA · BLOQUE 2 · CASOS RESUELTOS</a:t>
             </a:r>
           </a:p>
         </p:txBody>
@@ -4511,7 +4703,7 @@
                 </a:solidFill>
                 <a:latin typeface="Fredoka"/>
               </a:rPr>
-              <a:t>⚠ Ya está explicado</a:t>
+              <a:t>⚠ Una generalización amable</a:t>
             </a:r>
           </a:p>
         </p:txBody>
@@ -4593,7 +4785,7 @@
                 </a:solidFill>
                 <a:latin typeface="Nunito Sans"/>
               </a:rPr>
-              <a:t>Un chico: «La diferencia de sueldo es porque muchas mujeres trabajan a jornada parcial. Así que no hay ninguna desigualdad».</a:t>
+              <a:t>Una chica, harta de los comentarios contra los migrantes, escribe en un chat: «Pues los inmigrantes son todos buenísimos y muy trabajadores».</a:t>
             </a:r>
           </a:p>
         </p:txBody>
@@ -4641,7 +4833,7 @@
                 </a:solidFill>
                 <a:latin typeface="Nunito Sans"/>
               </a:rPr>
-              <a:t>¿Queda todo explicado?</a:t>
+              <a:t>Esa chica defiende a los migrantes. ¿Está razonando bien?</a:t>
             </a:r>
           </a:p>
           <a:p>
@@ -4666,7 +4858,7 @@
                 </a:solidFill>
                 <a:latin typeface="Nunito Sans"/>
               </a:rPr>
-              <a:t>Parece que sí: ha encontrado una causa real.</a:t>
+              <a:t>Parece que sí: su intención es buena y no ataca a nadie.</a:t>
             </a:r>
           </a:p>
           <a:p>
@@ -4691,7 +4883,7 @@
                 </a:solidFill>
                 <a:latin typeface="Nunito Sans"/>
               </a:rPr>
-              <a:t>Pero falta otra pregunta: ¿por qué hay muchas más mujeres que hombres a jornada parcial?</a:t>
+              <a:t>Pero dice «todos»: habla de millones de personas distintas como si fueran una sola.</a:t>
             </a:r>
           </a:p>
           <a:p>
@@ -4716,7 +4908,7 @@
                 </a:solidFill>
                 <a:latin typeface="Nunito Sans"/>
               </a:rPr>
-              <a:t>Muchas la eligen, o la aceptan, para cuidar a hijos o a mayores: el reparto de los cuidados es desigual.</a:t>
+              <a:t>Es otra generalización apresurada, aunque sea positiva (sesión 25).</a:t>
             </a:r>
           </a:p>
           <a:p>
@@ -4741,150 +4933,7 @@
                 </a:solidFill>
                 <a:latin typeface="Nunito Sans"/>
               </a:rPr>
-              <a:t>Conclusión: encontrar una causa no cierra el tema. A veces esa causa es otra desigualdad.</a:t>
-            </a:r>
-          </a:p>
-        </p:txBody>
-      </p:sp>
-    </p:spTree>
-  </p:cSld>
-  <p:clrMapOvr>
-    <a:masterClrMapping/>
-  </p:clrMapOvr>
-</p:sld>
-</file>
-
-<file path=ppt/slides/slide14.xml><?xml version="1.0" encoding="utf-8"?>
-<p:sld xmlns:a="http://schemas.openxmlformats.org/drawingml/2006/main" xmlns:p="http://schemas.openxmlformats.org/presentationml/2006/main" xmlns:r="http://schemas.openxmlformats.org/officeDocument/2006/relationships">
-  <p:cSld>
-    <p:bg>
-      <p:bgPr>
-        <a:solidFill>
-          <a:srgbClr val="FBF7EF"/>
-        </a:solidFill>
-        <a:effectLst/>
-      </p:bgPr>
-    </p:bg>
-    <p:spTree>
-      <p:nvGrpSpPr>
-        <p:cNvPr id="1" name=""/>
-        <p:cNvGrpSpPr/>
-        <p:nvPr/>
-      </p:nvGrpSpPr>
-      <p:grpSpPr/>
-      <p:sp>
-        <p:nvSpPr>
-          <p:cNvPr id="2" name="TextBox 1"/>
-          <p:cNvSpPr txBox="1"/>
-          <p:nvPr/>
-        </p:nvSpPr>
-        <p:spPr>
-          <a:xfrm>
-            <a:off x="640000" y="380000"/>
-            <a:ext cx="10912000" cy="420000"/>
-          </a:xfrm>
-          <a:prstGeom prst="rect">
-            <a:avLst/>
-          </a:prstGeom>
-          <a:noFill/>
-        </p:spPr>
-        <p:txBody>
-          <a:bodyPr wrap="square">
-            <a:spAutoFit/>
-          </a:bodyPr>
-          <a:lstStyle/>
-          <a:p>
-            <a:pPr>
-              <a:spcAft>
-                <a:spcPts val="630"/>
-              </a:spcAft>
-            </a:pPr>
-            <a:r>
-              <a:rPr sz="1400" b="1">
-                <a:solidFill>
-                  <a:srgbClr val="E8793A"/>
-                </a:solidFill>
-                <a:latin typeface="Nunito Sans"/>
-              </a:rPr>
-              <a:t>LO DE HOY EN TRES LÍNEAS</a:t>
-            </a:r>
-          </a:p>
-        </p:txBody>
-      </p:sp>
-      <p:sp>
-        <p:nvSpPr>
-          <p:cNvPr id="3" name="TextBox 2"/>
-          <p:cNvSpPr txBox="1"/>
-          <p:nvPr/>
-        </p:nvSpPr>
-        <p:spPr>
-          <a:xfrm>
-            <a:off x="640000" y="760000"/>
-            <a:ext cx="10912000" cy="800000"/>
-          </a:xfrm>
-          <a:prstGeom prst="rect">
-            <a:avLst/>
-          </a:prstGeom>
-          <a:noFill/>
-        </p:spPr>
-        <p:txBody>
-          <a:bodyPr wrap="square">
-            <a:spAutoFit/>
-          </a:bodyPr>
-          <a:lstStyle/>
-          <a:p>
-            <a:pPr>
-              <a:spcAft>
-                <a:spcPts val="1710"/>
-              </a:spcAft>
-            </a:pPr>
-            <a:r>
-              <a:rPr sz="3800" b="1">
-                <a:solidFill>
-                  <a:srgbClr val="1F2A44"/>
-                </a:solidFill>
-                <a:latin typeface="Fredoka"/>
-              </a:rPr>
-              <a:t>Escríbelo tú primero, sin mirar</a:t>
-            </a:r>
-          </a:p>
-        </p:txBody>
-      </p:sp>
-      <p:sp>
-        <p:nvSpPr>
-          <p:cNvPr id="4" name="TextBox 3"/>
-          <p:cNvSpPr txBox="1"/>
-          <p:nvPr/>
-        </p:nvSpPr>
-        <p:spPr>
-          <a:xfrm>
-            <a:off x="640000" y="1800000"/>
-            <a:ext cx="10912000" cy="1500000"/>
-          </a:xfrm>
-          <a:prstGeom prst="rect">
-            <a:avLst/>
-          </a:prstGeom>
-          <a:noFill/>
-        </p:spPr>
-        <p:txBody>
-          <a:bodyPr wrap="square">
-            <a:spAutoFit/>
-          </a:bodyPr>
-          <a:lstStyle/>
-          <a:p>
-            <a:pPr>
-              <a:spcAft>
-                <a:spcPts val="1170"/>
-              </a:spcAft>
-            </a:pPr>
-            <a:r>
-              <a:rPr sz="2600" b="0">
-                <a:solidFill>
-                  <a:srgbClr val="4A5568"/>
-                </a:solidFill>
-                <a:latin typeface="Nunito Sans"/>
-              </a:rPr>
-              <a:t>Dos minutos. Después lo comparamos.</a:t>
+              <a:t>Conclusión: los migrantes son personas variadas, como todas. Ni «todos malos» ni «todos buenos».</a:t>
             </a:r>
           </a:p>
         </p:txBody>
@@ -4962,8 +5011,8 @@
         </p:nvSpPr>
         <p:spPr>
           <a:xfrm>
-            <a:off x="640000" y="1300000"/>
-            <a:ext cx="10912000" cy="4800000"/>
+            <a:off x="640000" y="760000"/>
+            <a:ext cx="10912000" cy="800000"/>
           </a:xfrm>
           <a:prstGeom prst="rect">
             <a:avLst/>
@@ -4978,76 +5027,56 @@
           <a:p>
             <a:pPr>
               <a:spcAft>
-                <a:spcPts val="1350"/>
-              </a:spcAft>
-            </a:pPr>
-            <a:r>
-              <a:rPr sz="3000" b="1">
-                <a:solidFill>
-                  <a:srgbClr val="E8793A"/>
-                </a:solidFill>
-                <a:latin typeface="Nunito Sans"/>
-              </a:rPr>
-              <a:t>1. </a:t>
-            </a:r>
-            <a:r>
-              <a:rPr sz="3000" b="0">
+                <a:spcPts val="1710"/>
+              </a:spcAft>
+            </a:pPr>
+            <a:r>
+              <a:rPr sz="3800" b="1">
                 <a:solidFill>
                   <a:srgbClr val="1F2A44"/>
                 </a:solidFill>
-                <a:latin typeface="Nunito Sans"/>
-              </a:rPr>
-              <a:t>Diferencia es ser distintos; desigualdad es tener menos derechos u oportunidades por ser de un grupo.</a:t>
-            </a:r>
-          </a:p>
-          <a:p>
-            <a:pPr>
-              <a:spcAft>
-                <a:spcPts val="1350"/>
-              </a:spcAft>
-            </a:pPr>
-            <a:r>
-              <a:rPr sz="3000" b="1">
-                <a:solidFill>
-                  <a:srgbClr val="E8793A"/>
-                </a:solidFill>
-                <a:latin typeface="Nunito Sans"/>
-              </a:rPr>
-              <a:t>2. </a:t>
-            </a:r>
-            <a:r>
-              <a:rPr sz="3000" b="0">
-                <a:solidFill>
-                  <a:srgbClr val="1F2A44"/>
-                </a:solidFill>
-                <a:latin typeface="Nunito Sans"/>
-              </a:rPr>
-              <a:t>Los datos del INE muestran desigualdades de género en el sueldo y en los cuidados.</a:t>
-            </a:r>
-          </a:p>
-          <a:p>
-            <a:pPr>
-              <a:spcAft>
-                <a:spcPts val="1350"/>
-              </a:spcAft>
-            </a:pPr>
-            <a:r>
-              <a:rPr sz="3000" b="1">
-                <a:solidFill>
-                  <a:srgbClr val="E8793A"/>
-                </a:solidFill>
-                <a:latin typeface="Nunito Sans"/>
-              </a:rPr>
-              <a:t>3. </a:t>
-            </a:r>
-            <a:r>
-              <a:rPr sz="3000" b="0">
-                <a:solidFill>
-                  <a:srgbClr val="1F2A44"/>
-                </a:solidFill>
-                <a:latin typeface="Nunito Sans"/>
-              </a:rPr>
-              <a:t>Una diferencia en los datos no se explica sola: hay que preguntar por qué.</a:t>
+                <a:latin typeface="Fredoka"/>
+              </a:rPr>
+              <a:t>Escríbelo tú primero, sin mirar</a:t>
+            </a:r>
+          </a:p>
+        </p:txBody>
+      </p:sp>
+      <p:sp>
+        <p:nvSpPr>
+          <p:cNvPr id="4" name="TextBox 3"/>
+          <p:cNvSpPr txBox="1"/>
+          <p:nvPr/>
+        </p:nvSpPr>
+        <p:spPr>
+          <a:xfrm>
+            <a:off x="640000" y="1800000"/>
+            <a:ext cx="10912000" cy="1500000"/>
+          </a:xfrm>
+          <a:prstGeom prst="rect">
+            <a:avLst/>
+          </a:prstGeom>
+          <a:noFill/>
+        </p:spPr>
+        <p:txBody>
+          <a:bodyPr wrap="square">
+            <a:spAutoFit/>
+          </a:bodyPr>
+          <a:lstStyle/>
+          <a:p>
+            <a:pPr>
+              <a:spcAft>
+                <a:spcPts val="1170"/>
+              </a:spcAft>
+            </a:pPr>
+            <a:r>
+              <a:rPr sz="2600" b="0">
+                <a:solidFill>
+                  <a:srgbClr val="4A5568"/>
+                </a:solidFill>
+                <a:latin typeface="Nunito Sans"/>
+              </a:rPr>
+              <a:t>Dos minutos. Después lo comparamos.</a:t>
             </a:r>
           </a:p>
         </p:txBody>
@@ -5066,7 +5095,7 @@
     <p:bg>
       <p:bgPr>
         <a:solidFill>
-          <a:srgbClr val="1F2A44"/>
+          <a:srgbClr val="FBF7EF"/>
         </a:solidFill>
         <a:effectLst/>
       </p:bgPr>
@@ -5108,11 +5137,11 @@
             <a:r>
               <a:rPr sz="1400" b="1">
                 <a:solidFill>
-                  <a:srgbClr val="F4B183"/>
-                </a:solidFill>
-                <a:latin typeface="Nunito Sans"/>
-              </a:rPr>
-              <a:t>VÍDEO</a:t>
+                  <a:srgbClr val="E8793A"/>
+                </a:solidFill>
+                <a:latin typeface="Nunito Sans"/>
+              </a:rPr>
+              <a:t>LO DE HOY EN TRES LÍNEAS</a:t>
             </a:r>
           </a:p>
         </p:txBody>
@@ -5125,8 +5154,8 @@
         </p:nvSpPr>
         <p:spPr>
           <a:xfrm>
-            <a:off x="640000" y="760000"/>
-            <a:ext cx="10912000" cy="800000"/>
+            <a:off x="640000" y="1300000"/>
+            <a:ext cx="10912000" cy="4800000"/>
           </a:xfrm>
           <a:prstGeom prst="rect">
             <a:avLst/>
@@ -5141,56 +5170,76 @@
           <a:p>
             <a:pPr>
               <a:spcAft>
-                <a:spcPts val="1620"/>
-              </a:spcAft>
-            </a:pPr>
-            <a:r>
-              <a:rPr sz="3600" b="1">
-                <a:solidFill>
-                  <a:srgbClr val="FBF7EF"/>
-                </a:solidFill>
-                <a:latin typeface="Fredoka"/>
-              </a:rPr>
-              <a:t>El origen del 8 de marzo y la brecha salarial explicada de forma sencilla</a:t>
-            </a:r>
-          </a:p>
-        </p:txBody>
-      </p:sp>
-      <p:sp>
-        <p:nvSpPr>
-          <p:cNvPr id="4" name="TextBox 3"/>
-          <p:cNvSpPr txBox="1"/>
-          <p:nvPr/>
-        </p:nvSpPr>
-        <p:spPr>
-          <a:xfrm>
-            <a:off x="640000" y="2200000"/>
-            <a:ext cx="10912000" cy="2000000"/>
-          </a:xfrm>
-          <a:prstGeom prst="rect">
-            <a:avLst/>
-          </a:prstGeom>
-          <a:noFill/>
-        </p:spPr>
-        <p:txBody>
-          <a:bodyPr wrap="square">
-            <a:spAutoFit/>
-          </a:bodyPr>
-          <a:lstStyle/>
-          <a:p>
-            <a:pPr>
-              <a:spcAft>
-                <a:spcPts val="1080"/>
-              </a:spcAft>
-            </a:pPr>
-            <a:r>
-              <a:rPr sz="2400" b="0">
-                <a:solidFill>
-                  <a:srgbClr val="C9D3E6"/>
-                </a:solidFill>
-                <a:latin typeface="Nunito Sans"/>
-              </a:rPr>
-              <a:t>Ver de dónde viene el 8 de marzo y que la diferencia de sueldo tiene varias causas.</a:t>
+                <a:spcPts val="1350"/>
+              </a:spcAft>
+            </a:pPr>
+            <a:r>
+              <a:rPr sz="3000" b="1">
+                <a:solidFill>
+                  <a:srgbClr val="E8793A"/>
+                </a:solidFill>
+                <a:latin typeface="Nunito Sans"/>
+              </a:rPr>
+              <a:t>1. </a:t>
+            </a:r>
+            <a:r>
+              <a:rPr sz="3000" b="0">
+                <a:solidFill>
+                  <a:srgbClr val="1F2A44"/>
+                </a:solidFill>
+                <a:latin typeface="Nunito Sans"/>
+              </a:rPr>
+              <a:t>La globalización conecta el mundo; lo glocal es lo global vivido a nuestra manera.</a:t>
+            </a:r>
+          </a:p>
+          <a:p>
+            <a:pPr>
+              <a:spcAft>
+                <a:spcPts val="1350"/>
+              </a:spcAft>
+            </a:pPr>
+            <a:r>
+              <a:rPr sz="3000" b="1">
+                <a:solidFill>
+                  <a:srgbClr val="E8793A"/>
+                </a:solidFill>
+                <a:latin typeface="Nunito Sans"/>
+              </a:rPr>
+              <a:t>2. </a:t>
+            </a:r>
+            <a:r>
+              <a:rPr sz="3000" b="0">
+                <a:solidFill>
+                  <a:srgbClr val="1F2A44"/>
+                </a:solidFill>
+                <a:latin typeface="Nunito Sans"/>
+              </a:rPr>
+              <a:t>Se emigra por trabajo, guerra, clima o familia, y los humanos siempre hemos migrado.</a:t>
+            </a:r>
+          </a:p>
+          <a:p>
+            <a:pPr>
+              <a:spcAft>
+                <a:spcPts val="1350"/>
+              </a:spcAft>
+            </a:pPr>
+            <a:r>
+              <a:rPr sz="3000" b="1">
+                <a:solidFill>
+                  <a:srgbClr val="E8793A"/>
+                </a:solidFill>
+                <a:latin typeface="Nunito Sans"/>
+              </a:rPr>
+              <a:t>3. </a:t>
+            </a:r>
+            <a:r>
+              <a:rPr sz="3000" b="0">
+                <a:solidFill>
+                  <a:srgbClr val="1F2A44"/>
+                </a:solidFill>
+                <a:latin typeface="Nunito Sans"/>
+              </a:rPr>
+              <a:t>Sobre los migrantes circulan bulos y generalizaciones: comprueba la fuente y cuenta los casos.</a:t>
             </a:r>
           </a:p>
         </p:txBody>
@@ -5255,6 +5304,149 @@
                 </a:solidFill>
                 <a:latin typeface="Nunito Sans"/>
               </a:rPr>
+              <a:t>VÍDEO</a:t>
+            </a:r>
+          </a:p>
+        </p:txBody>
+      </p:sp>
+      <p:sp>
+        <p:nvSpPr>
+          <p:cNvPr id="3" name="TextBox 2"/>
+          <p:cNvSpPr txBox="1"/>
+          <p:nvPr/>
+        </p:nvSpPr>
+        <p:spPr>
+          <a:xfrm>
+            <a:off x="640000" y="760000"/>
+            <a:ext cx="10912000" cy="800000"/>
+          </a:xfrm>
+          <a:prstGeom prst="rect">
+            <a:avLst/>
+          </a:prstGeom>
+          <a:noFill/>
+        </p:spPr>
+        <p:txBody>
+          <a:bodyPr wrap="square">
+            <a:spAutoFit/>
+          </a:bodyPr>
+          <a:lstStyle/>
+          <a:p>
+            <a:pPr>
+              <a:spcAft>
+                <a:spcPts val="1620"/>
+              </a:spcAft>
+            </a:pPr>
+            <a:r>
+              <a:rPr sz="3600" b="1">
+                <a:solidFill>
+                  <a:srgbClr val="FBF7EF"/>
+                </a:solidFill>
+                <a:latin typeface="Fredoka"/>
+              </a:rPr>
+              <a:t>La emigración vasca a América en los siglos XIX y XX</a:t>
+            </a:r>
+          </a:p>
+        </p:txBody>
+      </p:sp>
+      <p:sp>
+        <p:nvSpPr>
+          <p:cNvPr id="4" name="TextBox 3"/>
+          <p:cNvSpPr txBox="1"/>
+          <p:nvPr/>
+        </p:nvSpPr>
+        <p:spPr>
+          <a:xfrm>
+            <a:off x="640000" y="2200000"/>
+            <a:ext cx="10912000" cy="2000000"/>
+          </a:xfrm>
+          <a:prstGeom prst="rect">
+            <a:avLst/>
+          </a:prstGeom>
+          <a:noFill/>
+        </p:spPr>
+        <p:txBody>
+          <a:bodyPr wrap="square">
+            <a:spAutoFit/>
+          </a:bodyPr>
+          <a:lstStyle/>
+          <a:p>
+            <a:pPr>
+              <a:spcAft>
+                <a:spcPts val="1080"/>
+              </a:spcAft>
+            </a:pPr>
+            <a:r>
+              <a:rPr sz="2400" b="0">
+                <a:solidFill>
+                  <a:srgbClr val="C9D3E6"/>
+                </a:solidFill>
+                <a:latin typeface="Nunito Sans"/>
+              </a:rPr>
+              <a:t>Que vean que migrar también forma parte de la historia de Euskadi.</a:t>
+            </a:r>
+          </a:p>
+        </p:txBody>
+      </p:sp>
+    </p:spTree>
+  </p:cSld>
+  <p:clrMapOvr>
+    <a:masterClrMapping/>
+  </p:clrMapOvr>
+</p:sld>
+</file>
+
+<file path=ppt/slides/slide18.xml><?xml version="1.0" encoding="utf-8"?>
+<p:sld xmlns:a="http://schemas.openxmlformats.org/drawingml/2006/main" xmlns:p="http://schemas.openxmlformats.org/presentationml/2006/main" xmlns:r="http://schemas.openxmlformats.org/officeDocument/2006/relationships">
+  <p:cSld>
+    <p:bg>
+      <p:bgPr>
+        <a:solidFill>
+          <a:srgbClr val="1F2A44"/>
+        </a:solidFill>
+        <a:effectLst/>
+      </p:bgPr>
+    </p:bg>
+    <p:spTree>
+      <p:nvGrpSpPr>
+        <p:cNvPr id="1" name=""/>
+        <p:cNvGrpSpPr/>
+        <p:nvPr/>
+      </p:nvGrpSpPr>
+      <p:grpSpPr/>
+      <p:sp>
+        <p:nvSpPr>
+          <p:cNvPr id="2" name="TextBox 1"/>
+          <p:cNvSpPr txBox="1"/>
+          <p:nvPr/>
+        </p:nvSpPr>
+        <p:spPr>
+          <a:xfrm>
+            <a:off x="640000" y="380000"/>
+            <a:ext cx="10912000" cy="420000"/>
+          </a:xfrm>
+          <a:prstGeom prst="rect">
+            <a:avLst/>
+          </a:prstGeom>
+          <a:noFill/>
+        </p:spPr>
+        <p:txBody>
+          <a:bodyPr wrap="square">
+            <a:spAutoFit/>
+          </a:bodyPr>
+          <a:lstStyle/>
+          <a:p>
+            <a:pPr>
+              <a:spcAft>
+                <a:spcPts val="630"/>
+              </a:spcAft>
+            </a:pPr>
+            <a:r>
+              <a:rPr sz="1400" b="1">
+                <a:solidFill>
+                  <a:srgbClr val="F4B183"/>
+                </a:solidFill>
+                <a:latin typeface="Nunito Sans"/>
+              </a:rPr>
               <a:t>AHORA, LA HOJA DEL DÍA</a:t>
             </a:r>
           </a:p>
@@ -5848,7 +6040,7 @@
                 </a:solidFill>
                 <a:latin typeface="Nunito Sans"/>
               </a:rPr>
-              <a:t>Los estereotipos nacen de ______ deprisa, como en la generalización apresurada.  (sesión 81)</a:t>
+              <a:t>El relativismo ______ dice que cada costumbre se entiende dentro de su cultura.  (sesión 81)</a:t>
             </a:r>
           </a:p>
           <a:p>
@@ -5873,7 +6065,7 @@
                 </a:solidFill>
                 <a:latin typeface="Nunito Sans"/>
               </a:rPr>
-              <a:t>El ______ son los roles y las expectativas que una sociedad asocia a ser hombre o mujer.  (sesión 81)</a:t>
+              <a:t>La cultura se ______: no viene en los genes.  (sesión 81)</a:t>
             </a:r>
           </a:p>
           <a:p>
@@ -5898,7 +6090,7 @@
                 </a:solidFill>
                 <a:latin typeface="Nunito Sans"/>
               </a:rPr>
-              <a:t>Quien ______ un mensaje dañino también es responsable.  (sesión 77)</a:t>
+              <a:t>La palabra «normal» puede significar frecuente o ______.  (sesión 77)</a:t>
             </a:r>
           </a:p>
         </p:txBody>
@@ -6050,7 +6242,7 @@
                 </a:solidFill>
                 <a:latin typeface="Nunito Sans"/>
               </a:rPr>
-              <a:t>Los estereotipos nacen de </a:t>
+              <a:t>El relativismo </a:t>
             </a:r>
             <a:r>
               <a:rPr sz="2600" b="1">
@@ -6059,7 +6251,7 @@
                 </a:solidFill>
                 <a:latin typeface="Nunito Sans"/>
               </a:rPr>
-              <a:t>generalizar</a:t>
+              <a:t>cultural</a:t>
             </a:r>
             <a:r>
               <a:rPr sz="2600" b="0">
@@ -6068,7 +6260,7 @@
                 </a:solidFill>
                 <a:latin typeface="Nunito Sans"/>
               </a:rPr>
-              <a:t> deprisa, como en la generalización apresurada.  (sesión 81)</a:t>
+              <a:t> dice que cada costumbre se entiende dentro de su cultura.  (sesión 81)</a:t>
             </a:r>
           </a:p>
           <a:p>
@@ -6093,7 +6285,7 @@
                 </a:solidFill>
                 <a:latin typeface="Nunito Sans"/>
               </a:rPr>
-              <a:t>El </a:t>
+              <a:t>La cultura se </a:t>
             </a:r>
             <a:r>
               <a:rPr sz="2600" b="1">
@@ -6102,7 +6294,7 @@
                 </a:solidFill>
                 <a:latin typeface="Nunito Sans"/>
               </a:rPr>
-              <a:t>género</a:t>
+              <a:t>aprende</a:t>
             </a:r>
             <a:r>
               <a:rPr sz="2600" b="0">
@@ -6111,7 +6303,7 @@
                 </a:solidFill>
                 <a:latin typeface="Nunito Sans"/>
               </a:rPr>
-              <a:t> son los roles y las expectativas que una sociedad asocia a ser hombre o mujer.  (sesión 81)</a:t>
+              <a:t>: no viene en los genes.  (sesión 81)</a:t>
             </a:r>
           </a:p>
           <a:p>
@@ -6136,7 +6328,7 @@
                 </a:solidFill>
                 <a:latin typeface="Nunito Sans"/>
               </a:rPr>
-              <a:t>Quien </a:t>
+              <a:t>La palabra «normal» puede significar frecuente o </a:t>
             </a:r>
             <a:r>
               <a:rPr sz="2600" b="1">
@@ -6145,7 +6337,7 @@
                 </a:solidFill>
                 <a:latin typeface="Nunito Sans"/>
               </a:rPr>
-              <a:t>reenvía</a:t>
+              <a:t>correcto</a:t>
             </a:r>
             <a:r>
               <a:rPr sz="2600" b="0">
@@ -6154,7 +6346,7 @@
                 </a:solidFill>
                 <a:latin typeface="Nunito Sans"/>
               </a:rPr>
-              <a:t> un mensaje dañino también es responsable.  (sesión 77)</a:t>
+              <a:t>.  (sesión 77)</a:t>
             </a:r>
           </a:p>
         </p:txBody>
@@ -6301,7 +6493,7 @@
                 </a:solidFill>
                 <a:latin typeface="Nunito Sans"/>
               </a:rPr>
-              <a:t>Un chico: «Las chicas y los chicos ya son iguales. Hoy cualquiera puede estudiar lo que quiera».</a:t>
+              <a:t>Tu móvil se diseñó en un país, se montó en otro y lleva minerales de otros más. Tu camiseta, igual. Y los usas en Bilbao.</a:t>
             </a:r>
           </a:p>
         </p:txBody>
@@ -6340,7 +6532,7 @@
                 </a:solidFill>
                 <a:latin typeface="Nunito Sans"/>
               </a:rPr>
-              <a:t>¿Qué tendrías que mirar para saber si tiene razón?</a:t>
+              <a:t>¿Cuántos países caben en lo que llevas encima hoy?</a:t>
             </a:r>
           </a:p>
         </p:txBody>
@@ -6444,7 +6636,7 @@
                 </a:solidFill>
                 <a:latin typeface="Fredoka"/>
               </a:rPr>
-              <a:t>Diferencia y desigualdad</a:t>
+              <a:t>Un mundo conectado</a:t>
             </a:r>
           </a:p>
         </p:txBody>
@@ -6509,7 +6701,7 @@
                 </a:solidFill>
                 <a:latin typeface="Nunito Sans"/>
               </a:rPr>
-              <a:t>BLOQUE 1 · DIFERENCIA Y DESIGUALDAD</a:t>
+              <a:t>BLOQUE 1 · UN MUNDO CONECTADO</a:t>
             </a:r>
           </a:p>
         </p:txBody>
@@ -6548,242 +6740,227 @@
                 </a:solidFill>
                 <a:latin typeface="Fredoka"/>
               </a:rPr>
-              <a:t>No es lo mismo</a:t>
-            </a:r>
-          </a:p>
-        </p:txBody>
-      </p:sp>
-      <p:graphicFrame>
-        <p:nvGraphicFramePr>
-          <p:cNvPr id="4" name="Table 3"/>
-          <p:cNvGraphicFramePr>
-            <a:graphicFrameLocks noGrp="1"/>
-          </p:cNvGraphicFramePr>
+              <a:t>Globalización</a:t>
+            </a:r>
+          </a:p>
+        </p:txBody>
+      </p:sp>
+      <p:sp>
+        <p:nvSpPr>
+          <p:cNvPr id="4" name="Rectangle 3"/>
+          <p:cNvSpPr/>
           <p:nvPr/>
-        </p:nvGraphicFramePr>
-        <p:xfrm>
-          <a:off x="640000" y="1700000"/>
-          <a:ext cx="10912000" cy="1800000"/>
-        </p:xfrm>
-        <a:graphic>
-          <a:graphicData uri="http://schemas.openxmlformats.org/drawingml/2006/table">
-            <a:tbl>
-              <a:tblPr firstRow="1" bandRow="1">
-                <a:tableStyleId>{5C22544A-7EE6-4342-B048-85BDC9FD1C3A}</a:tableStyleId>
-              </a:tblPr>
-              <a:tblGrid>
-                <a:gridCol w="3637333"/>
-                <a:gridCol w="3637333"/>
-                <a:gridCol w="3637334"/>
-              </a:tblGrid>
-              <a:tr h="600000">
-                <a:tc>
-                  <a:txBody>
-                    <a:bodyPr/>
-                    <a:lstStyle/>
-                    <a:p>
-                      <a:r>
-                        <a:rPr sz="2000" b="1">
-                          <a:solidFill>
-                            <a:srgbClr val="FBF7EF"/>
-                          </a:solidFill>
-                          <a:latin typeface="Fredoka"/>
-                        </a:rPr>
-                        <a:t>Palabra</a:t>
-                      </a:r>
-                    </a:p>
-                  </a:txBody>
-                  <a:tcPr>
-                    <a:solidFill>
-                      <a:srgbClr val="1F2A44"/>
-                    </a:solidFill>
-                  </a:tcPr>
-                </a:tc>
-                <a:tc>
-                  <a:txBody>
-                    <a:bodyPr/>
-                    <a:lstStyle/>
-                    <a:p>
-                      <a:r>
-                        <a:rPr sz="2000" b="1">
-                          <a:solidFill>
-                            <a:srgbClr val="FBF7EF"/>
-                          </a:solidFill>
-                          <a:latin typeface="Fredoka"/>
-                        </a:rPr>
-                        <a:t>Qué es</a:t>
-                      </a:r>
-                    </a:p>
-                  </a:txBody>
-                  <a:tcPr>
-                    <a:solidFill>
-                      <a:srgbClr val="1F2A44"/>
-                    </a:solidFill>
-                  </a:tcPr>
-                </a:tc>
-                <a:tc>
-                  <a:txBody>
-                    <a:bodyPr/>
-                    <a:lstStyle/>
-                    <a:p>
-                      <a:r>
-                        <a:rPr sz="2000" b="1">
-                          <a:solidFill>
-                            <a:srgbClr val="FBF7EF"/>
-                          </a:solidFill>
-                          <a:latin typeface="Fredoka"/>
-                        </a:rPr>
-                        <a:t>Ejemplo</a:t>
-                      </a:r>
-                    </a:p>
-                  </a:txBody>
-                  <a:tcPr>
-                    <a:solidFill>
-                      <a:srgbClr val="1F2A44"/>
-                    </a:solidFill>
-                  </a:tcPr>
-                </a:tc>
-              </a:tr>
-              <a:tr h="600000">
-                <a:tc>
-                  <a:txBody>
-                    <a:bodyPr/>
-                    <a:lstStyle/>
-                    <a:p>
-                      <a:r>
-                        <a:rPr sz="2000" b="1">
-                          <a:solidFill>
-                            <a:srgbClr val="1F2A44"/>
-                          </a:solidFill>
-                          <a:latin typeface="Nunito Sans"/>
-                        </a:rPr>
-                        <a:t>Diferencia</a:t>
-                      </a:r>
-                    </a:p>
-                  </a:txBody>
-                  <a:tcPr>
-                    <a:solidFill>
-                      <a:srgbClr val="FFFFFF"/>
-                    </a:solidFill>
-                  </a:tcPr>
-                </a:tc>
-                <a:tc>
-                  <a:txBody>
-                    <a:bodyPr/>
-                    <a:lstStyle/>
-                    <a:p>
-                      <a:r>
-                        <a:rPr sz="2000" b="0">
-                          <a:solidFill>
-                            <a:srgbClr val="1F2A44"/>
-                          </a:solidFill>
-                          <a:latin typeface="Nunito Sans"/>
-                        </a:rPr>
-                        <a:t>Ser distintos en algo</a:t>
-                      </a:r>
-                    </a:p>
-                  </a:txBody>
-                  <a:tcPr>
-                    <a:solidFill>
-                      <a:srgbClr val="FFFFFF"/>
-                    </a:solidFill>
-                  </a:tcPr>
-                </a:tc>
-                <a:tc>
-                  <a:txBody>
-                    <a:bodyPr/>
-                    <a:lstStyle/>
-                    <a:p>
-                      <a:r>
-                        <a:rPr sz="2000" b="0">
-                          <a:solidFill>
-                            <a:srgbClr val="1F2A44"/>
-                          </a:solidFill>
-                          <a:latin typeface="Nunito Sans"/>
-                        </a:rPr>
-                        <a:t>Una chica es alta y un chico, bajito. A otro le gusta bailar.</a:t>
-                      </a:r>
-                    </a:p>
-                  </a:txBody>
-                  <a:tcPr>
-                    <a:solidFill>
-                      <a:srgbClr val="FFFFFF"/>
-                    </a:solidFill>
-                  </a:tcPr>
-                </a:tc>
-              </a:tr>
-              <a:tr h="600000">
-                <a:tc>
-                  <a:txBody>
-                    <a:bodyPr/>
-                    <a:lstStyle/>
-                    <a:p>
-                      <a:r>
-                        <a:rPr sz="2000" b="1">
-                          <a:solidFill>
-                            <a:srgbClr val="1F2A44"/>
-                          </a:solidFill>
-                          <a:latin typeface="Nunito Sans"/>
-                        </a:rPr>
-                        <a:t>Desigualdad</a:t>
-                      </a:r>
-                    </a:p>
-                  </a:txBody>
-                  <a:tcPr>
-                    <a:solidFill>
-                      <a:srgbClr val="EAF0F7"/>
-                    </a:solidFill>
-                  </a:tcPr>
-                </a:tc>
-                <a:tc>
-                  <a:txBody>
-                    <a:bodyPr/>
-                    <a:lstStyle/>
-                    <a:p>
-                      <a:r>
-                        <a:rPr sz="2000" b="0">
-                          <a:solidFill>
-                            <a:srgbClr val="1F2A44"/>
-                          </a:solidFill>
-                          <a:latin typeface="Nunito Sans"/>
-                        </a:rPr>
-                        <a:t>Tener menos derechos u oportunidades por ser de un grupo</a:t>
-                      </a:r>
-                    </a:p>
-                  </a:txBody>
-                  <a:tcPr>
-                    <a:solidFill>
-                      <a:srgbClr val="EAF0F7"/>
-                    </a:solidFill>
-                  </a:tcPr>
-                </a:tc>
-                <a:tc>
-                  <a:txBody>
-                    <a:bodyPr/>
-                    <a:lstStyle/>
-                    <a:p>
-                      <a:r>
-                        <a:rPr sz="2000" b="0">
-                          <a:solidFill>
-                            <a:srgbClr val="1F2A44"/>
-                          </a:solidFill>
-                          <a:latin typeface="Nunito Sans"/>
-                        </a:rPr>
-                        <a:t>No poder votar por ser mujer</a:t>
-                      </a:r>
-                    </a:p>
-                  </a:txBody>
-                  <a:tcPr>
-                    <a:solidFill>
-                      <a:srgbClr val="EAF0F7"/>
-                    </a:solidFill>
-                  </a:tcPr>
-                </a:tc>
-              </a:tr>
-            </a:tbl>
-          </a:graphicData>
-        </a:graphic>
-      </p:graphicFrame>
+        </p:nvSpPr>
+        <p:spPr>
+          <a:xfrm>
+            <a:off x="640000" y="1650000"/>
+            <a:ext cx="10912000" cy="1150000"/>
+          </a:xfrm>
+          <a:prstGeom prst="rect">
+            <a:avLst/>
+          </a:prstGeom>
+          <a:solidFill>
+            <a:srgbClr val="EAF0F7"/>
+          </a:solidFill>
+          <a:ln>
+            <a:noFill/>
+          </a:ln>
+        </p:spPr>
+        <p:style>
+          <a:lnRef idx="1">
+            <a:schemeClr val="accent1"/>
+          </a:lnRef>
+          <a:fillRef idx="3">
+            <a:schemeClr val="accent1"/>
+          </a:fillRef>
+          <a:effectRef idx="2">
+            <a:schemeClr val="accent1"/>
+          </a:effectRef>
+          <a:fontRef idx="minor">
+            <a:schemeClr val="lt1"/>
+          </a:fontRef>
+        </p:style>
+        <p:txBody>
+          <a:bodyPr rtlCol="0" anchor="ctr"/>
+          <a:lstStyle/>
+          <a:p>
+            <a:pPr algn="ctr"/>
+          </a:p>
+        </p:txBody>
+      </p:sp>
+      <p:sp>
+        <p:nvSpPr>
+          <p:cNvPr id="5" name="TextBox 4"/>
+          <p:cNvSpPr txBox="1"/>
+          <p:nvPr/>
+        </p:nvSpPr>
+        <p:spPr>
+          <a:xfrm>
+            <a:off x="840000" y="1730000"/>
+            <a:ext cx="10512000" cy="1000000"/>
+          </a:xfrm>
+          <a:prstGeom prst="rect">
+            <a:avLst/>
+          </a:prstGeom>
+          <a:noFill/>
+        </p:spPr>
+        <p:txBody>
+          <a:bodyPr wrap="square" anchor="ctr">
+            <a:spAutoFit/>
+          </a:bodyPr>
+          <a:lstStyle/>
+          <a:p>
+            <a:pPr>
+              <a:spcAft>
+                <a:spcPts val="1260"/>
+              </a:spcAft>
+            </a:pPr>
+            <a:r>
+              <a:rPr sz="2800" b="1">
+                <a:solidFill>
+                  <a:srgbClr val="1F2A44"/>
+                </a:solidFill>
+                <a:latin typeface="Nunito Sans"/>
+              </a:rPr>
+              <a:t>Es que los países están cada vez más conectados: productos, dinero, personas, noticias e ideas viajan por todo el mundo.</a:t>
+            </a:r>
+          </a:p>
+        </p:txBody>
+      </p:sp>
+      <p:sp>
+        <p:nvSpPr>
+          <p:cNvPr id="6" name="TextBox 5"/>
+          <p:cNvSpPr txBox="1"/>
+          <p:nvPr/>
+        </p:nvSpPr>
+        <p:spPr>
+          <a:xfrm>
+            <a:off x="640000" y="3000000"/>
+            <a:ext cx="10912000" cy="3458000"/>
+          </a:xfrm>
+          <a:prstGeom prst="rect">
+            <a:avLst/>
+          </a:prstGeom>
+          <a:noFill/>
+        </p:spPr>
+        <p:txBody>
+          <a:bodyPr wrap="square">
+            <a:spAutoFit/>
+          </a:bodyPr>
+          <a:lstStyle/>
+          <a:p>
+            <a:pPr>
+              <a:spcAft>
+                <a:spcPts val="1260"/>
+              </a:spcAft>
+            </a:pPr>
+            <a:r>
+              <a:rPr sz="2800" b="1">
+                <a:solidFill>
+                  <a:srgbClr val="E8793A"/>
+                </a:solidFill>
+                <a:latin typeface="Nunito Sans"/>
+              </a:rPr>
+              <a:t>• </a:t>
+            </a:r>
+            <a:r>
+              <a:rPr sz="2800" b="1">
+                <a:solidFill>
+                  <a:srgbClr val="1F2A44"/>
+                </a:solidFill>
+                <a:latin typeface="Nunito Sans"/>
+              </a:rPr>
+              <a:t>Económica:</a:t>
+            </a:r>
+            <a:r>
+              <a:rPr sz="2800" b="0">
+                <a:solidFill>
+                  <a:srgbClr val="1F2A44"/>
+                </a:solidFill>
+                <a:latin typeface="Nunito Sans"/>
+              </a:rPr>
+              <a:t> empresas y productos de todas partes</a:t>
+            </a:r>
+          </a:p>
+          <a:p>
+            <a:pPr>
+              <a:spcAft>
+                <a:spcPts val="1260"/>
+              </a:spcAft>
+            </a:pPr>
+            <a:r>
+              <a:rPr sz="2800" b="1">
+                <a:solidFill>
+                  <a:srgbClr val="E8793A"/>
+                </a:solidFill>
+                <a:latin typeface="Nunito Sans"/>
+              </a:rPr>
+              <a:t>• </a:t>
+            </a:r>
+            <a:r>
+              <a:rPr sz="2800" b="1">
+                <a:solidFill>
+                  <a:srgbClr val="1F2A44"/>
+                </a:solidFill>
+                <a:latin typeface="Nunito Sans"/>
+              </a:rPr>
+              <a:t>Cultural:</a:t>
+            </a:r>
+            <a:r>
+              <a:rPr sz="2800" b="0">
+                <a:solidFill>
+                  <a:srgbClr val="1F2A44"/>
+                </a:solidFill>
+                <a:latin typeface="Nunito Sans"/>
+              </a:rPr>
+              <a:t> series, música, comida y redes de todo el mundo</a:t>
+            </a:r>
+          </a:p>
+          <a:p>
+            <a:pPr>
+              <a:spcAft>
+                <a:spcPts val="1260"/>
+              </a:spcAft>
+            </a:pPr>
+            <a:r>
+              <a:rPr sz="2800" b="1">
+                <a:solidFill>
+                  <a:srgbClr val="E8793A"/>
+                </a:solidFill>
+                <a:latin typeface="Nunito Sans"/>
+              </a:rPr>
+              <a:t>• </a:t>
+            </a:r>
+            <a:r>
+              <a:rPr sz="2800" b="0">
+                <a:solidFill>
+                  <a:srgbClr val="1F2A44"/>
+                </a:solidFill>
+                <a:latin typeface="Nunito Sans"/>
+              </a:rPr>
+              <a:t>La hacen posible </a:t>
+            </a:r>
+            <a:r>
+              <a:rPr sz="2800" b="1">
+                <a:solidFill>
+                  <a:srgbClr val="1F2A44"/>
+                </a:solidFill>
+                <a:latin typeface="Nunito Sans"/>
+              </a:rPr>
+              <a:t>internet</a:t>
+            </a:r>
+            <a:r>
+              <a:rPr sz="2800" b="0">
+                <a:solidFill>
+                  <a:srgbClr val="1F2A44"/>
+                </a:solidFill>
+                <a:latin typeface="Nunito Sans"/>
+              </a:rPr>
+              <a:t> y el transporte barato</a:t>
+            </a:r>
+          </a:p>
+        </p:txBody>
+      </p:sp>
     </p:spTree>
   </p:cSld>
   <p:clrMapOvr>
@@ -6844,7 +7021,7 @@
                 </a:solidFill>
                 <a:latin typeface="Nunito Sans"/>
               </a:rPr>
-              <a:t>BLOQUE 1 · DIFERENCIA Y DESIGUALDAD</a:t>
+              <a:t>BLOQUE 1 · UN MUNDO CONECTADO</a:t>
             </a:r>
           </a:p>
         </p:txBody>
@@ -6883,7 +7060,7 @@
                 </a:solidFill>
                 <a:latin typeface="Fredoka"/>
               </a:rPr>
-              <a:t>Desigualdad de género</a:t>
+              <a:t>Glocal</a:t>
             </a:r>
           </a:p>
         </p:txBody>
@@ -6965,7 +7142,7 @@
                 </a:solidFill>
                 <a:latin typeface="Nunito Sans"/>
               </a:rPr>
-              <a:t>Es cuando hombres y mujeres no tienen los mismos derechos, oportunidades o trato solo por ser hombres o mujeres.</a:t>
+              <a:t>Es lo global mezclado con lo local: lo que llega de todo el mundo se vive a nuestra manera.</a:t>
             </a:r>
           </a:p>
         </p:txBody>
@@ -7007,13 +7184,54 @@
               <a:t>• </a:t>
             </a:r>
             <a:r>
+              <a:rPr sz="2800" b="0">
+                <a:solidFill>
+                  <a:srgbClr val="1F2A44"/>
+                </a:solidFill>
+                <a:latin typeface="Nunito Sans"/>
+              </a:rPr>
+              <a:t>Una serie de otro país, doblada al euskera</a:t>
+            </a:r>
+          </a:p>
+          <a:p>
+            <a:pPr>
+              <a:spcAft>
+                <a:spcPts val="1260"/>
+              </a:spcAft>
+            </a:pPr>
+            <a:r>
               <a:rPr sz="2800" b="1">
                 <a:solidFill>
+                  <a:srgbClr val="E8793A"/>
+                </a:solidFill>
+                <a:latin typeface="Nunito Sans"/>
+              </a:rPr>
+              <a:t>• </a:t>
+            </a:r>
+            <a:r>
+              <a:rPr sz="2800" b="0">
+                <a:solidFill>
                   <a:srgbClr val="1F2A44"/>
                 </a:solidFill>
                 <a:latin typeface="Nunito Sans"/>
               </a:rPr>
-              <a:t>Diferentes, pero iguales:</a:t>
+              <a:t>Canciones en euskera con ritmos de todo el mundo</a:t>
+            </a:r>
+          </a:p>
+          <a:p>
+            <a:pPr>
+              <a:spcAft>
+                <a:spcPts val="1260"/>
+              </a:spcAft>
+            </a:pPr>
+            <a:r>
+              <a:rPr sz="2800" b="1">
+                <a:solidFill>
+                  <a:srgbClr val="E8793A"/>
+                </a:solidFill>
+                <a:latin typeface="Nunito Sans"/>
+              </a:rPr>
+              <a:t>• </a:t>
             </a:r>
             <a:r>
               <a:rPr sz="2800" b="0">
@@ -7022,75 +7240,7 @@
                 </a:solidFill>
                 <a:latin typeface="Nunito Sans"/>
               </a:rPr>
-              <a:t> en derechos y en dignidad</a:t>
-            </a:r>
-          </a:p>
-          <a:p>
-            <a:pPr>
-              <a:spcAft>
-                <a:spcPts val="1260"/>
-              </a:spcAft>
-            </a:pPr>
-            <a:r>
-              <a:rPr sz="2800" b="1">
-                <a:solidFill>
-                  <a:srgbClr val="E8793A"/>
-                </a:solidFill>
-                <a:latin typeface="Nunito Sans"/>
-              </a:rPr>
-              <a:t>• </a:t>
-            </a:r>
-            <a:r>
-              <a:rPr sz="2800" b="0">
-                <a:solidFill>
-                  <a:srgbClr val="1F2A44"/>
-                </a:solidFill>
-                <a:latin typeface="Nunito Sans"/>
-              </a:rPr>
-              <a:t>En España, las mujeres votaron por primera vez en </a:t>
-            </a:r>
-            <a:r>
-              <a:rPr sz="2800" b="1">
-                <a:solidFill>
-                  <a:srgbClr val="1F2A44"/>
-                </a:solidFill>
-                <a:latin typeface="Nunito Sans"/>
-              </a:rPr>
-              <a:t>1933</a:t>
-            </a:r>
-          </a:p>
-          <a:p>
-            <a:pPr>
-              <a:spcAft>
-                <a:spcPts val="1260"/>
-              </a:spcAft>
-            </a:pPr>
-            <a:r>
-              <a:rPr sz="2800" b="1">
-                <a:solidFill>
-                  <a:srgbClr val="E8793A"/>
-                </a:solidFill>
-                <a:latin typeface="Nunito Sans"/>
-              </a:rPr>
-              <a:t>• </a:t>
-            </a:r>
-            <a:r>
-              <a:rPr sz="2800" b="0">
-                <a:solidFill>
-                  <a:srgbClr val="1F2A44"/>
-                </a:solidFill>
-                <a:latin typeface="Nunito Sans"/>
-              </a:rPr>
-              <a:t>Una ley igual no basta: hay que mirar la </a:t>
-            </a:r>
-            <a:r>
-              <a:rPr sz="2800" b="1">
-                <a:solidFill>
-                  <a:srgbClr val="1F2A44"/>
-                </a:solidFill>
-                <a:latin typeface="Nunito Sans"/>
-              </a:rPr>
-              <a:t>vida real</a:t>
+              <a:t>Una app mundial para quedar con tu cuadrilla</a:t>
             </a:r>
           </a:p>
         </p:txBody>
@@ -7155,7 +7305,7 @@
                 </a:solidFill>
                 <a:latin typeface="Nunito Sans"/>
               </a:rPr>
-              <a:t>BLOQUE 1 · DIFERENCIA Y DESIGUALDAD</a:t>
+              <a:t>BLOQUE 1 · UN MUNDO CONECTADO</a:t>
             </a:r>
           </a:p>
         </p:txBody>
@@ -7194,14 +7344,57 @@
                 </a:solidFill>
                 <a:latin typeface="Fredoka"/>
               </a:rPr>
-              <a:t>Algunos datos reales</a:t>
-            </a:r>
-          </a:p>
-        </p:txBody>
-      </p:sp>
-      <p:sp>
-        <p:nvSpPr>
-          <p:cNvPr id="4" name="TextBox 3"/>
+              <a:t>Migrar</a:t>
+            </a:r>
+          </a:p>
+        </p:txBody>
+      </p:sp>
+      <p:sp>
+        <p:nvSpPr>
+          <p:cNvPr id="4" name="Rectangle 3"/>
+          <p:cNvSpPr/>
+          <p:nvPr/>
+        </p:nvSpPr>
+        <p:spPr>
+          <a:xfrm>
+            <a:off x="640000" y="1650000"/>
+            <a:ext cx="10912000" cy="1150000"/>
+          </a:xfrm>
+          <a:prstGeom prst="rect">
+            <a:avLst/>
+          </a:prstGeom>
+          <a:solidFill>
+            <a:srgbClr val="EAF0F7"/>
+          </a:solidFill>
+          <a:ln>
+            <a:noFill/>
+          </a:ln>
+        </p:spPr>
+        <p:style>
+          <a:lnRef idx="1">
+            <a:schemeClr val="accent1"/>
+          </a:lnRef>
+          <a:fillRef idx="3">
+            <a:schemeClr val="accent1"/>
+          </a:fillRef>
+          <a:effectRef idx="2">
+            <a:schemeClr val="accent1"/>
+          </a:effectRef>
+          <a:fontRef idx="minor">
+            <a:schemeClr val="lt1"/>
+          </a:fontRef>
+        </p:style>
+        <p:txBody>
+          <a:bodyPr rtlCol="0" anchor="ctr"/>
+          <a:lstStyle/>
+          <a:p>
+            <a:pPr algn="ctr"/>
+          </a:p>
+        </p:txBody>
+      </p:sp>
+      <p:sp>
+        <p:nvSpPr>
+          <p:cNvPr id="5" name="TextBox 4"/>
           <p:cNvSpPr txBox="1"/>
           <p:nvPr/>
         </p:nvSpPr>
@@ -7223,42 +7416,24 @@
           <a:p>
             <a:pPr>
               <a:spcAft>
-                <a:spcPts val="1080"/>
-              </a:spcAft>
-            </a:pPr>
-            <a:r>
-              <a:rPr sz="2400" b="0">
+                <a:spcPts val="1260"/>
+              </a:spcAft>
+            </a:pPr>
+            <a:r>
+              <a:rPr sz="2800" b="1">
                 <a:solidFill>
                   <a:srgbClr val="1F2A44"/>
                 </a:solidFill>
                 <a:latin typeface="Nunito Sans"/>
               </a:rPr>
-              <a:t>Datos oficiales sobre España (</a:t>
-            </a:r>
-            <a:r>
-              <a:rPr sz="2400" b="1">
-                <a:solidFill>
-                  <a:srgbClr val="1F2A44"/>
-                </a:solidFill>
-                <a:latin typeface="Nunito Sans"/>
-              </a:rPr>
-              <a:t>INE</a:t>
-            </a:r>
-            <a:r>
-              <a:rPr sz="2400" b="0">
-                <a:solidFill>
-                  <a:srgbClr val="1F2A44"/>
-                </a:solidFill>
-                <a:latin typeface="Nunito Sans"/>
-              </a:rPr>
-              <a:t> y Seguridad Social):</a:t>
-            </a:r>
-          </a:p>
-        </p:txBody>
-      </p:sp>
-      <p:sp>
-        <p:nvSpPr>
-          <p:cNvPr id="5" name="TextBox 4"/>
+              <a:t>Es irse a vivir a otro país o a otra región durante mucho tiempo.</a:t>
+            </a:r>
+          </a:p>
+        </p:txBody>
+      </p:sp>
+      <p:sp>
+        <p:nvSpPr>
+          <p:cNvPr id="6" name="TextBox 5"/>
           <p:cNvSpPr txBox="1"/>
           <p:nvPr/>
         </p:nvSpPr>
@@ -7299,7 +7474,7 @@
                 </a:solidFill>
                 <a:latin typeface="Nunito Sans"/>
               </a:rPr>
-              <a:t>Sueldo:</a:t>
+              <a:t>Emigrar:</a:t>
             </a:r>
             <a:r>
               <a:rPr sz="2800" b="0">
@@ -7308,7 +7483,7 @@
                 </a:solidFill>
                 <a:latin typeface="Nunito Sans"/>
               </a:rPr>
-              <a:t> de media, las mujeres cobran menos al año que los hombres</a:t>
+              <a:t> salir del lugar donde vivías</a:t>
             </a:r>
           </a:p>
           <a:p>
@@ -7333,7 +7508,7 @@
                 </a:solidFill>
                 <a:latin typeface="Nunito Sans"/>
               </a:rPr>
-              <a:t>Jornada parcial:</a:t>
+              <a:t>Inmigrar:</a:t>
             </a:r>
             <a:r>
               <a:rPr sz="2800" b="0">
@@ -7342,7 +7517,7 @@
                 </a:solidFill>
                 <a:latin typeface="Nunito Sans"/>
               </a:rPr>
-              <a:t> la tienen muchas más mujeres que hombres</a:t>
+              <a:t> llegar a vivir a un lugar nuevo</a:t>
             </a:r>
           </a:p>
           <a:p>
@@ -7361,56 +7536,13 @@
               <a:t>• </a:t>
             </a:r>
             <a:r>
-              <a:rPr sz="2800" b="1">
+              <a:rPr sz="2800" b="0">
                 <a:solidFill>
                   <a:srgbClr val="1F2A44"/>
                 </a:solidFill>
                 <a:latin typeface="Nunito Sans"/>
               </a:rPr>
-              <a:t>Tiempo:</a:t>
-            </a:r>
-            <a:r>
-              <a:rPr sz="2800" b="0">
-                <a:solidFill>
-                  <a:srgbClr val="1F2A44"/>
-                </a:solidFill>
-                <a:latin typeface="Nunito Sans"/>
-              </a:rPr>
-              <a:t> las mujeres dedican más horas a la casa y a cuidar</a:t>
-            </a:r>
-          </a:p>
-          <a:p>
-            <a:pPr>
-              <a:spcAft>
-                <a:spcPts val="1260"/>
-              </a:spcAft>
-            </a:pPr>
-            <a:r>
-              <a:rPr sz="2800" b="1">
-                <a:solidFill>
-                  <a:srgbClr val="E8793A"/>
-                </a:solidFill>
-                <a:latin typeface="Nunito Sans"/>
-              </a:rPr>
-              <a:t>• </a:t>
-            </a:r>
-            <a:r>
-              <a:rPr sz="2800" b="1">
-                <a:solidFill>
-                  <a:srgbClr val="1F2A44"/>
-                </a:solidFill>
-                <a:latin typeface="Nunito Sans"/>
-              </a:rPr>
-              <a:t>Cuidar a los hijos:</a:t>
-            </a:r>
-            <a:r>
-              <a:rPr sz="2800" b="0">
-                <a:solidFill>
-                  <a:srgbClr val="1F2A44"/>
-                </a:solidFill>
-                <a:latin typeface="Nunito Sans"/>
-              </a:rPr>
-              <a:t> la gran mayoría de quienes piden excedencia son mujeres</a:t>
+              <a:t>La misma persona es emigrante allí e inmigrante aquí</a:t>
             </a:r>
           </a:p>
         </p:txBody>
@@ -7475,7 +7607,7 @@
                 </a:solidFill>
                 <a:latin typeface="Nunito Sans"/>
               </a:rPr>
-              <a:t>BLOQUE 1 · DIFERENCIA Y DESIGUALDAD</a:t>
+              <a:t>BLOQUE 1 · UN MUNDO CONECTADO</a:t>
             </a:r>
           </a:p>
         </p:txBody>
@@ -7514,51 +7646,47 @@
                 </a:solidFill>
                 <a:latin typeface="Fredoka"/>
               </a:rPr>
-              <a:t>El 8 de marzo</a:t>
-            </a:r>
-          </a:p>
-        </p:txBody>
-      </p:sp>
-      <p:sp>
-        <p:nvSpPr>
-          <p:cNvPr id="4" name="Rectangle 3"/>
-          <p:cNvSpPr/>
+              <a:t>¿Por qué emigra la gente?</a:t>
+            </a:r>
+          </a:p>
+        </p:txBody>
+      </p:sp>
+      <p:sp>
+        <p:nvSpPr>
+          <p:cNvPr id="4" name="TextBox 3"/>
+          <p:cNvSpPr txBox="1"/>
           <p:nvPr/>
         </p:nvSpPr>
         <p:spPr>
           <a:xfrm>
-            <a:off x="640000" y="1650000"/>
-            <a:ext cx="10912000" cy="1150000"/>
-          </a:xfrm>
-          <a:prstGeom prst="rect">
-            <a:avLst/>
-          </a:prstGeom>
-          <a:solidFill>
-            <a:srgbClr val="EAF0F7"/>
-          </a:solidFill>
-          <a:ln>
-            <a:noFill/>
-          </a:ln>
-        </p:spPr>
-        <p:style>
-          <a:lnRef idx="1">
-            <a:schemeClr val="accent1"/>
-          </a:lnRef>
-          <a:fillRef idx="3">
-            <a:schemeClr val="accent1"/>
-          </a:fillRef>
-          <a:effectRef idx="2">
-            <a:schemeClr val="accent1"/>
-          </a:effectRef>
-          <a:fontRef idx="minor">
-            <a:schemeClr val="lt1"/>
-          </a:fontRef>
-        </p:style>
-        <p:txBody>
-          <a:bodyPr rtlCol="0" anchor="ctr"/>
-          <a:lstStyle/>
-          <a:p>
-            <a:pPr algn="ctr"/>
+            <a:off x="840000" y="1730000"/>
+            <a:ext cx="10512000" cy="1000000"/>
+          </a:xfrm>
+          <a:prstGeom prst="rect">
+            <a:avLst/>
+          </a:prstGeom>
+          <a:noFill/>
+        </p:spPr>
+        <p:txBody>
+          <a:bodyPr wrap="square" anchor="ctr">
+            <a:spAutoFit/>
+          </a:bodyPr>
+          <a:lstStyle/>
+          <a:p>
+            <a:pPr>
+              <a:spcAft>
+                <a:spcPts val="1080"/>
+              </a:spcAft>
+            </a:pPr>
+            <a:r>
+              <a:rPr sz="2400" b="0">
+                <a:solidFill>
+                  <a:srgbClr val="1F2A44"/>
+                </a:solidFill>
+                <a:latin typeface="Nunito Sans"/>
+              </a:rPr>
+              <a:t>Casi siempre hay varias razones a la vez.</a:t>
+            </a:r>
           </a:p>
         </p:txBody>
       </p:sp>
@@ -7570,45 +7698,6 @@
         </p:nvSpPr>
         <p:spPr>
           <a:xfrm>
-            <a:off x="840000" y="1730000"/>
-            <a:ext cx="10512000" cy="1000000"/>
-          </a:xfrm>
-          <a:prstGeom prst="rect">
-            <a:avLst/>
-          </a:prstGeom>
-          <a:noFill/>
-        </p:spPr>
-        <p:txBody>
-          <a:bodyPr wrap="square" anchor="ctr">
-            <a:spAutoFit/>
-          </a:bodyPr>
-          <a:lstStyle/>
-          <a:p>
-            <a:pPr>
-              <a:spcAft>
-                <a:spcPts val="1260"/>
-              </a:spcAft>
-            </a:pPr>
-            <a:r>
-              <a:rPr sz="2800" b="1">
-                <a:solidFill>
-                  <a:srgbClr val="1F2A44"/>
-                </a:solidFill>
-                <a:latin typeface="Nunito Sans"/>
-              </a:rPr>
-              <a:t>Es el Día Internacional de la Mujer. Recuerda la lucha por la igualdad de derechos entre mujeres y hombres.</a:t>
-            </a:r>
-          </a:p>
-        </p:txBody>
-      </p:sp>
-      <p:sp>
-        <p:nvSpPr>
-          <p:cNvPr id="6" name="TextBox 5"/>
-          <p:cNvSpPr txBox="1"/>
-          <p:nvPr/>
-        </p:nvSpPr>
-        <p:spPr>
-          <a:xfrm>
             <a:off x="640000" y="3000000"/>
             <a:ext cx="10912000" cy="3458000"/>
           </a:xfrm>
@@ -7638,22 +7727,47 @@
               <a:t>• </a:t>
             </a:r>
             <a:r>
+              <a:rPr sz="2800" b="1">
+                <a:solidFill>
+                  <a:srgbClr val="1F2A44"/>
+                </a:solidFill>
+                <a:latin typeface="Nunito Sans"/>
+              </a:rPr>
+              <a:t>Trabajo:</a:t>
+            </a:r>
+            <a:r>
               <a:rPr sz="2800" b="0">
                 <a:solidFill>
                   <a:srgbClr val="1F2A44"/>
                 </a:solidFill>
                 <a:latin typeface="Nunito Sans"/>
               </a:rPr>
-              <a:t>Nace de las protestas de </a:t>
-            </a:r>
+              <a:t> buscar un empleo o un sueldo mejor.</a:t>
+            </a:r>
+          </a:p>
+          <a:p>
+            <a:pPr>
+              <a:spcAft>
+                <a:spcPts val="1260"/>
+              </a:spcAft>
+            </a:pPr>
             <a:r>
               <a:rPr sz="2800" b="1">
                 <a:solidFill>
+                  <a:srgbClr val="E8793A"/>
+                </a:solidFill>
+                <a:latin typeface="Nunito Sans"/>
+              </a:rPr>
+              <a:t>• </a:t>
+            </a:r>
+            <a:r>
+              <a:rPr sz="2800" b="1">
+                <a:solidFill>
                   <a:srgbClr val="1F2A44"/>
                 </a:solidFill>
                 <a:latin typeface="Nunito Sans"/>
               </a:rPr>
-              <a:t>mujeres trabajadoras</a:t>
+              <a:t>Guerra o persecución:</a:t>
             </a:r>
             <a:r>
               <a:rPr sz="2800" b="0">
@@ -7662,7 +7776,7 @@
                 </a:solidFill>
                 <a:latin typeface="Nunito Sans"/>
               </a:rPr>
-              <a:t> a principios del siglo XX</a:t>
+              <a:t> huir para salvar la vida.</a:t>
             </a:r>
           </a:p>
           <a:p>
@@ -7681,22 +7795,47 @@
               <a:t>• </a:t>
             </a:r>
             <a:r>
+              <a:rPr sz="2800" b="1">
+                <a:solidFill>
+                  <a:srgbClr val="1F2A44"/>
+                </a:solidFill>
+                <a:latin typeface="Nunito Sans"/>
+              </a:rPr>
+              <a:t>Clima y desastres:</a:t>
+            </a:r>
+            <a:r>
               <a:rPr sz="2800" b="0">
                 <a:solidFill>
                   <a:srgbClr val="1F2A44"/>
                 </a:solidFill>
                 <a:latin typeface="Nunito Sans"/>
               </a:rPr>
-              <a:t>La </a:t>
-            </a:r>
+              <a:t> sequías, inundaciones, terremotos.</a:t>
+            </a:r>
+          </a:p>
+          <a:p>
+            <a:pPr>
+              <a:spcAft>
+                <a:spcPts val="1260"/>
+              </a:spcAft>
+            </a:pPr>
             <a:r>
               <a:rPr sz="2800" b="1">
                 <a:solidFill>
+                  <a:srgbClr val="E8793A"/>
+                </a:solidFill>
+                <a:latin typeface="Nunito Sans"/>
+              </a:rPr>
+              <a:t>• </a:t>
+            </a:r>
+            <a:r>
+              <a:rPr sz="2800" b="1">
+                <a:solidFill>
                   <a:srgbClr val="1F2A44"/>
                 </a:solidFill>
                 <a:latin typeface="Nunito Sans"/>
               </a:rPr>
-              <a:t>ONU</a:t>
+              <a:t>Familia y estudios:</a:t>
             </a:r>
             <a:r>
               <a:rPr sz="2800" b="0">
@@ -7705,50 +7844,7 @@
                 </a:solidFill>
                 <a:latin typeface="Nunito Sans"/>
               </a:rPr>
-              <a:t> lo celebra oficialmente desde </a:t>
-            </a:r>
-            <a:r>
-              <a:rPr sz="2800" b="1">
-                <a:solidFill>
-                  <a:srgbClr val="1F2A44"/>
-                </a:solidFill>
-                <a:latin typeface="Nunito Sans"/>
-              </a:rPr>
-              <a:t>1975</a:t>
-            </a:r>
-          </a:p>
-          <a:p>
-            <a:pPr>
-              <a:spcAft>
-                <a:spcPts val="1260"/>
-              </a:spcAft>
-            </a:pPr>
-            <a:r>
-              <a:rPr sz="2800" b="1">
-                <a:solidFill>
-                  <a:srgbClr val="E8793A"/>
-                </a:solidFill>
-                <a:latin typeface="Nunito Sans"/>
-              </a:rPr>
-              <a:t>• </a:t>
-            </a:r>
-            <a:r>
-              <a:rPr sz="2800" b="0">
-                <a:solidFill>
-                  <a:srgbClr val="1F2A44"/>
-                </a:solidFill>
-                <a:latin typeface="Nunito Sans"/>
-              </a:rPr>
-              <a:t>No es un día contra los hombres, sino </a:t>
-            </a:r>
-            <a:r>
-              <a:rPr sz="2800" b="1">
-                <a:solidFill>
-                  <a:srgbClr val="1F2A44"/>
-                </a:solidFill>
-                <a:latin typeface="Nunito Sans"/>
-              </a:rPr>
-              <a:t>por la igualdad</a:t>
+              <a:t> reunirse con los suyos, estudiar fuera.</a:t>
             </a:r>
           </a:p>
         </p:txBody>
